--- a/public/presentatie-pivot.pptx
+++ b/public/presentatie-pivot.pptx
@@ -5,11 +5,11 @@
     <p:sldMasterId id="2147483648" r:id="rId1"/>
   </p:sldMasterIdLst>
   <p:sldIdLst>
-    <p:sldId id="256" r:id="rId7"/>
-    <p:sldId id="257" r:id="rId8"/>
-    <p:sldId id="258" r:id="rId9"/>
+    <p:sldId id="260" r:id="rId2"/>
+    <p:sldId id="256" r:id="rId3"/>
+    <p:sldId id="259" r:id="rId4"/>
   </p:sldIdLst>
-  <p:sldSz cx="12188952" cy="6858000" type="screen4x3"/>
+  <p:sldSz cx="12188825" cy="6858000"/>
   <p:notesSz cx="6858000" cy="9144000"/>
   <p:defaultTextStyle>
     <a:defPPr>
@@ -106,7 +106,144 @@
       </a:defRPr>
     </a:lvl9pPr>
   </p:defaultTextStyle>
+  <p:extLst>
+    <p:ext uri="{EFAFB233-063F-42B5-8137-9DF3F51BA10A}">
+      <p15:sldGuideLst xmlns:p15="http://schemas.microsoft.com/office/powerpoint/2012/main">
+        <p15:guide id="1" orient="horz" pos="2160">
+          <p15:clr>
+            <a:srgbClr val="A4A3A4"/>
+          </p15:clr>
+        </p15:guide>
+        <p15:guide id="2" pos="2880">
+          <p15:clr>
+            <a:srgbClr val="A4A3A4"/>
+          </p15:clr>
+        </p15:guide>
+      </p15:sldGuideLst>
+    </p:ext>
+  </p:extLst>
 </p:presentation>
+</file>
+
+<file path=ppt/revisionInfo.xml><?xml version="1.0" encoding="utf-8"?>
+<p1510:revInfo xmlns:a="http://schemas.openxmlformats.org/drawingml/2006/main" xmlns:r="http://schemas.openxmlformats.org/officeDocument/2006/relationships" xmlns:p1510="http://schemas.microsoft.com/office/powerpoint/2015/10/main">
+  <p1510:revLst>
+    <p1510:client id="{8C57CFE6-4AC6-6B44-9B8E-2BABB2163EEC}" v="3" dt="2026-04-15T09:20:05.186"/>
+  </p1510:revLst>
+</p1510:revInfo>
+</file>
+
+<file path=ppt/changesInfos/changesInfo1.xml><?xml version="1.0" encoding="utf-8"?>
+<pc:chgInfo xmlns:a="http://schemas.openxmlformats.org/drawingml/2006/main" xmlns:r="http://schemas.openxmlformats.org/officeDocument/2006/relationships" xmlns:ac="http://schemas.microsoft.com/office/drawing/2013/main/command" xmlns:pc="http://schemas.microsoft.com/office/powerpoint/2013/main/command">
+  <pc:docChgLst>
+    <pc:chgData name="Jan Roelof Bouwman" userId="48071cc4-f17a-4ff3-9ba0-87c3e2805490" providerId="ADAL" clId="{1081F9F5-E7FE-58F6-9DF0-2935CA9D2395}"/>
+    <pc:docChg chg="undo custSel addSld delSld modSld sldOrd">
+      <pc:chgData name="Jan Roelof Bouwman" userId="48071cc4-f17a-4ff3-9ba0-87c3e2805490" providerId="ADAL" clId="{1081F9F5-E7FE-58F6-9DF0-2935CA9D2395}" dt="2026-04-19T14:27:23.460" v="31" actId="2696"/>
+      <pc:docMkLst>
+        <pc:docMk/>
+      </pc:docMkLst>
+      <pc:sldChg chg="modSp mod">
+        <pc:chgData name="Jan Roelof Bouwman" userId="48071cc4-f17a-4ff3-9ba0-87c3e2805490" providerId="ADAL" clId="{1081F9F5-E7FE-58F6-9DF0-2935CA9D2395}" dt="2026-04-15T09:22:04.355" v="29" actId="20577"/>
+        <pc:sldMkLst>
+          <pc:docMk/>
+          <pc:sldMk cId="0" sldId="256"/>
+        </pc:sldMkLst>
+        <pc:spChg chg="mod">
+          <ac:chgData name="Jan Roelof Bouwman" userId="48071cc4-f17a-4ff3-9ba0-87c3e2805490" providerId="ADAL" clId="{1081F9F5-E7FE-58F6-9DF0-2935CA9D2395}" dt="2026-04-15T09:20:47.578" v="25" actId="1076"/>
+          <ac:spMkLst>
+            <pc:docMk/>
+            <pc:sldMk cId="0" sldId="256"/>
+            <ac:spMk id="2" creationId="{00000000-0000-0000-0000-000000000000}"/>
+          </ac:spMkLst>
+        </pc:spChg>
+        <pc:spChg chg="mod">
+          <ac:chgData name="Jan Roelof Bouwman" userId="48071cc4-f17a-4ff3-9ba0-87c3e2805490" providerId="ADAL" clId="{1081F9F5-E7FE-58F6-9DF0-2935CA9D2395}" dt="2026-04-15T09:22:04.355" v="29" actId="20577"/>
+          <ac:spMkLst>
+            <pc:docMk/>
+            <pc:sldMk cId="0" sldId="256"/>
+            <ac:spMk id="8" creationId="{00000000-0000-0000-0000-000000000000}"/>
+          </ac:spMkLst>
+        </pc:spChg>
+      </pc:sldChg>
+      <pc:sldChg chg="del">
+        <pc:chgData name="Jan Roelof Bouwman" userId="48071cc4-f17a-4ff3-9ba0-87c3e2805490" providerId="ADAL" clId="{1081F9F5-E7FE-58F6-9DF0-2935CA9D2395}" dt="2026-04-19T14:27:22.699" v="30" actId="2696"/>
+        <pc:sldMkLst>
+          <pc:docMk/>
+          <pc:sldMk cId="0" sldId="257"/>
+        </pc:sldMkLst>
+      </pc:sldChg>
+      <pc:sldChg chg="del">
+        <pc:chgData name="Jan Roelof Bouwman" userId="48071cc4-f17a-4ff3-9ba0-87c3e2805490" providerId="ADAL" clId="{1081F9F5-E7FE-58F6-9DF0-2935CA9D2395}" dt="2026-04-19T14:27:23.460" v="31" actId="2696"/>
+        <pc:sldMkLst>
+          <pc:docMk/>
+          <pc:sldMk cId="0" sldId="258"/>
+        </pc:sldMkLst>
+      </pc:sldChg>
+      <pc:sldChg chg="addSp delSp modSp mod">
+        <pc:chgData name="Jan Roelof Bouwman" userId="48071cc4-f17a-4ff3-9ba0-87c3e2805490" providerId="ADAL" clId="{1081F9F5-E7FE-58F6-9DF0-2935CA9D2395}" dt="2026-04-15T09:17:26.674" v="15" actId="1076"/>
+        <pc:sldMkLst>
+          <pc:docMk/>
+          <pc:sldMk cId="0" sldId="259"/>
+        </pc:sldMkLst>
+        <pc:spChg chg="mod">
+          <ac:chgData name="Jan Roelof Bouwman" userId="48071cc4-f17a-4ff3-9ba0-87c3e2805490" providerId="ADAL" clId="{1081F9F5-E7FE-58F6-9DF0-2935CA9D2395}" dt="2026-04-15T09:16:58.590" v="8" actId="1076"/>
+          <ac:spMkLst>
+            <pc:docMk/>
+            <pc:sldMk cId="0" sldId="259"/>
+            <ac:spMk id="2" creationId="{00000000-0000-0000-0000-000000000000}"/>
+          </ac:spMkLst>
+        </pc:spChg>
+        <pc:spChg chg="mod">
+          <ac:chgData name="Jan Roelof Bouwman" userId="48071cc4-f17a-4ff3-9ba0-87c3e2805490" providerId="ADAL" clId="{1081F9F5-E7FE-58F6-9DF0-2935CA9D2395}" dt="2026-04-15T09:17:26.674" v="15" actId="1076"/>
+          <ac:spMkLst>
+            <pc:docMk/>
+            <pc:sldMk cId="0" sldId="259"/>
+            <ac:spMk id="28" creationId="{00000000-0000-0000-0000-000000000000}"/>
+          </ac:spMkLst>
+        </pc:spChg>
+        <pc:picChg chg="add mod">
+          <ac:chgData name="Jan Roelof Bouwman" userId="48071cc4-f17a-4ff3-9ba0-87c3e2805490" providerId="ADAL" clId="{1081F9F5-E7FE-58F6-9DF0-2935CA9D2395}" dt="2026-04-15T09:17:04.266" v="10" actId="1076"/>
+          <ac:picMkLst>
+            <pc:docMk/>
+            <pc:sldMk cId="0" sldId="259"/>
+            <ac:picMk id="43" creationId="{5636DD46-2E93-0BB5-F0D1-3592E8379BA5}"/>
+          </ac:picMkLst>
+        </pc:picChg>
+        <pc:picChg chg="add mod">
+          <ac:chgData name="Jan Roelof Bouwman" userId="48071cc4-f17a-4ff3-9ba0-87c3e2805490" providerId="ADAL" clId="{1081F9F5-E7FE-58F6-9DF0-2935CA9D2395}" dt="2026-04-15T09:17:01.463" v="9" actId="1076"/>
+          <ac:picMkLst>
+            <pc:docMk/>
+            <pc:sldMk cId="0" sldId="259"/>
+            <ac:picMk id="45" creationId="{E51741A4-D742-7E0A-6BD5-DB0E52219862}"/>
+          </ac:picMkLst>
+        </pc:picChg>
+      </pc:sldChg>
+      <pc:sldChg chg="modSp add mod ord">
+        <pc:chgData name="Jan Roelof Bouwman" userId="48071cc4-f17a-4ff3-9ba0-87c3e2805490" providerId="ADAL" clId="{1081F9F5-E7FE-58F6-9DF0-2935CA9D2395}" dt="2026-04-15T09:21:47.914" v="26" actId="20577"/>
+        <pc:sldMkLst>
+          <pc:docMk/>
+          <pc:sldMk cId="0" sldId="260"/>
+        </pc:sldMkLst>
+        <pc:spChg chg="mod">
+          <ac:chgData name="Jan Roelof Bouwman" userId="48071cc4-f17a-4ff3-9ba0-87c3e2805490" providerId="ADAL" clId="{1081F9F5-E7FE-58F6-9DF0-2935CA9D2395}" dt="2026-04-15T09:20:42.923" v="23" actId="1076"/>
+          <ac:spMkLst>
+            <pc:docMk/>
+            <pc:sldMk cId="0" sldId="260"/>
+            <ac:spMk id="2" creationId="{00000000-0000-0000-0000-000000000000}"/>
+          </ac:spMkLst>
+        </pc:spChg>
+        <pc:spChg chg="mod">
+          <ac:chgData name="Jan Roelof Bouwman" userId="48071cc4-f17a-4ff3-9ba0-87c3e2805490" providerId="ADAL" clId="{1081F9F5-E7FE-58F6-9DF0-2935CA9D2395}" dt="2026-04-15T09:21:47.914" v="26" actId="20577"/>
+          <ac:spMkLst>
+            <pc:docMk/>
+            <pc:sldMk cId="0" sldId="260"/>
+            <ac:spMk id="5" creationId="{00000000-0000-0000-0000-000000000000}"/>
+          </ac:spMkLst>
+        </pc:spChg>
+      </pc:sldChg>
+    </pc:docChg>
+  </pc:docChgLst>
+</pc:chgInfo>
 </file>
 
 <file path=ppt/slideLayouts/slideLayout1.xml><?xml version="1.0" encoding="utf-8"?>
@@ -147,10 +284,9 @@
           <a:lstStyle/>
           <a:p>
             <a:r>
-              <a:rPr lang="en-US" smtClean="0"/>
+              <a:rPr lang="en-US"/>
               <a:t>Click to edit Master title style</a:t>
             </a:r>
-            <a:endParaRPr lang="en-US"/>
           </a:p>
         </p:txBody>
       </p:sp>
@@ -266,10 +402,9 @@
           </a:lstStyle>
           <a:p>
             <a:r>
-              <a:rPr lang="en-US" smtClean="0"/>
+              <a:rPr lang="en-US"/>
               <a:t>Click to edit Master subtitle style</a:t>
             </a:r>
-            <a:endParaRPr lang="en-US"/>
           </a:p>
         </p:txBody>
       </p:sp>
@@ -290,7 +425,7 @@
           <a:p>
             <a:fld id="{5BCAD085-E8A6-8845-BD4E-CB4CCA059FC4}" type="datetimeFigureOut">
               <a:rPr lang="en-US" smtClean="0"/>
-              <a:t>1/27/13</a:t>
+              <a:t>4/19/26</a:t>
             </a:fld>
             <a:endParaRPr lang="en-US"/>
           </a:p>
@@ -332,7 +467,7 @@
           <a:p>
             <a:fld id="{C1FF6DA9-008F-8B48-92A6-B652298478BF}" type="slidenum">
               <a:rPr lang="en-US" smtClean="0"/>
-              <a:t>‹#›</a:t>
+              <a:t>‹nr.›</a:t>
             </a:fld>
             <a:endParaRPr lang="en-US"/>
           </a:p>
@@ -384,10 +519,9 @@
           <a:lstStyle/>
           <a:p>
             <a:r>
-              <a:rPr lang="en-US" smtClean="0"/>
+              <a:rPr lang="en-US"/>
               <a:t>Click to edit Master title style</a:t>
             </a:r>
-            <a:endParaRPr lang="en-US"/>
           </a:p>
         </p:txBody>
       </p:sp>
@@ -408,38 +542,37 @@
           <a:p>
             <a:pPr lvl="0"/>
             <a:r>
-              <a:rPr lang="en-US" smtClean="0"/>
+              <a:rPr lang="en-US"/>
               <a:t>Click to edit Master text styles</a:t>
             </a:r>
           </a:p>
           <a:p>
             <a:pPr lvl="1"/>
             <a:r>
-              <a:rPr lang="en-US" smtClean="0"/>
+              <a:rPr lang="en-US"/>
               <a:t>Second level</a:t>
             </a:r>
           </a:p>
           <a:p>
             <a:pPr lvl="2"/>
             <a:r>
-              <a:rPr lang="en-US" smtClean="0"/>
+              <a:rPr lang="en-US"/>
               <a:t>Third level</a:t>
             </a:r>
           </a:p>
           <a:p>
             <a:pPr lvl="3"/>
             <a:r>
-              <a:rPr lang="en-US" smtClean="0"/>
+              <a:rPr lang="en-US"/>
               <a:t>Fourth level</a:t>
             </a:r>
           </a:p>
           <a:p>
             <a:pPr lvl="4"/>
             <a:r>
-              <a:rPr lang="en-US" smtClean="0"/>
+              <a:rPr lang="en-US"/>
               <a:t>Fifth level</a:t>
             </a:r>
-            <a:endParaRPr lang="en-US"/>
           </a:p>
         </p:txBody>
       </p:sp>
@@ -460,7 +593,7 @@
           <a:p>
             <a:fld id="{5BCAD085-E8A6-8845-BD4E-CB4CCA059FC4}" type="datetimeFigureOut">
               <a:rPr lang="en-US" smtClean="0"/>
-              <a:t>1/27/13</a:t>
+              <a:t>4/19/26</a:t>
             </a:fld>
             <a:endParaRPr lang="en-US"/>
           </a:p>
@@ -502,7 +635,7 @@
           <a:p>
             <a:fld id="{C1FF6DA9-008F-8B48-92A6-B652298478BF}" type="slidenum">
               <a:rPr lang="en-US" smtClean="0"/>
-              <a:t>‹#›</a:t>
+              <a:t>‹nr.›</a:t>
             </a:fld>
             <a:endParaRPr lang="en-US"/>
           </a:p>
@@ -559,10 +692,9 @@
           <a:lstStyle/>
           <a:p>
             <a:r>
-              <a:rPr lang="en-US" smtClean="0"/>
+              <a:rPr lang="en-US"/>
               <a:t>Click to edit Master title style</a:t>
             </a:r>
-            <a:endParaRPr lang="en-US"/>
           </a:p>
         </p:txBody>
       </p:sp>
@@ -588,38 +720,37 @@
           <a:p>
             <a:pPr lvl="0"/>
             <a:r>
-              <a:rPr lang="en-US" smtClean="0"/>
+              <a:rPr lang="en-US"/>
               <a:t>Click to edit Master text styles</a:t>
             </a:r>
           </a:p>
           <a:p>
             <a:pPr lvl="1"/>
             <a:r>
-              <a:rPr lang="en-US" smtClean="0"/>
+              <a:rPr lang="en-US"/>
               <a:t>Second level</a:t>
             </a:r>
           </a:p>
           <a:p>
             <a:pPr lvl="2"/>
             <a:r>
-              <a:rPr lang="en-US" smtClean="0"/>
+              <a:rPr lang="en-US"/>
               <a:t>Third level</a:t>
             </a:r>
           </a:p>
           <a:p>
             <a:pPr lvl="3"/>
             <a:r>
-              <a:rPr lang="en-US" smtClean="0"/>
+              <a:rPr lang="en-US"/>
               <a:t>Fourth level</a:t>
             </a:r>
           </a:p>
           <a:p>
             <a:pPr lvl="4"/>
             <a:r>
-              <a:rPr lang="en-US" smtClean="0"/>
+              <a:rPr lang="en-US"/>
               <a:t>Fifth level</a:t>
             </a:r>
-            <a:endParaRPr lang="en-US"/>
           </a:p>
         </p:txBody>
       </p:sp>
@@ -640,7 +771,7 @@
           <a:p>
             <a:fld id="{5BCAD085-E8A6-8845-BD4E-CB4CCA059FC4}" type="datetimeFigureOut">
               <a:rPr lang="en-US" smtClean="0"/>
-              <a:t>1/27/13</a:t>
+              <a:t>4/19/26</a:t>
             </a:fld>
             <a:endParaRPr lang="en-US"/>
           </a:p>
@@ -682,7 +813,7 @@
           <a:p>
             <a:fld id="{C1FF6DA9-008F-8B48-92A6-B652298478BF}" type="slidenum">
               <a:rPr lang="en-US" smtClean="0"/>
-              <a:t>‹#›</a:t>
+              <a:t>‹nr.›</a:t>
             </a:fld>
             <a:endParaRPr lang="en-US"/>
           </a:p>
@@ -734,10 +865,9 @@
           <a:lstStyle/>
           <a:p>
             <a:r>
-              <a:rPr lang="en-US" smtClean="0"/>
+              <a:rPr lang="en-US"/>
               <a:t>Click to edit Master title style</a:t>
             </a:r>
-            <a:endParaRPr lang="en-US"/>
           </a:p>
         </p:txBody>
       </p:sp>
@@ -758,38 +888,37 @@
           <a:p>
             <a:pPr lvl="0"/>
             <a:r>
-              <a:rPr lang="en-US" smtClean="0"/>
+              <a:rPr lang="en-US"/>
               <a:t>Click to edit Master text styles</a:t>
             </a:r>
           </a:p>
           <a:p>
             <a:pPr lvl="1"/>
             <a:r>
-              <a:rPr lang="en-US" smtClean="0"/>
+              <a:rPr lang="en-US"/>
               <a:t>Second level</a:t>
             </a:r>
           </a:p>
           <a:p>
             <a:pPr lvl="2"/>
             <a:r>
-              <a:rPr lang="en-US" smtClean="0"/>
+              <a:rPr lang="en-US"/>
               <a:t>Third level</a:t>
             </a:r>
           </a:p>
           <a:p>
             <a:pPr lvl="3"/>
             <a:r>
-              <a:rPr lang="en-US" smtClean="0"/>
+              <a:rPr lang="en-US"/>
               <a:t>Fourth level</a:t>
             </a:r>
           </a:p>
           <a:p>
             <a:pPr lvl="4"/>
             <a:r>
-              <a:rPr lang="en-US" smtClean="0"/>
+              <a:rPr lang="en-US"/>
               <a:t>Fifth level</a:t>
             </a:r>
-            <a:endParaRPr lang="en-US"/>
           </a:p>
         </p:txBody>
       </p:sp>
@@ -810,7 +939,7 @@
           <a:p>
             <a:fld id="{5BCAD085-E8A6-8845-BD4E-CB4CCA059FC4}" type="datetimeFigureOut">
               <a:rPr lang="en-US" smtClean="0"/>
-              <a:t>1/27/13</a:t>
+              <a:t>4/19/26</a:t>
             </a:fld>
             <a:endParaRPr lang="en-US"/>
           </a:p>
@@ -852,7 +981,7 @@
           <a:p>
             <a:fld id="{C1FF6DA9-008F-8B48-92A6-B652298478BF}" type="slidenum">
               <a:rPr lang="en-US" smtClean="0"/>
-              <a:t>‹#›</a:t>
+              <a:t>‹nr.›</a:t>
             </a:fld>
             <a:endParaRPr lang="en-US"/>
           </a:p>
@@ -913,10 +1042,9 @@
           </a:lstStyle>
           <a:p>
             <a:r>
-              <a:rPr lang="en-US" smtClean="0"/>
+              <a:rPr lang="en-US"/>
               <a:t>Click to edit Master title style</a:t>
             </a:r>
-            <a:endParaRPr lang="en-US"/>
           </a:p>
         </p:txBody>
       </p:sp>
@@ -1033,7 +1161,7 @@
           <a:p>
             <a:pPr lvl="0"/>
             <a:r>
-              <a:rPr lang="en-US" smtClean="0"/>
+              <a:rPr lang="en-US"/>
               <a:t>Click to edit Master text styles</a:t>
             </a:r>
           </a:p>
@@ -1056,7 +1184,7 @@
           <a:p>
             <a:fld id="{5BCAD085-E8A6-8845-BD4E-CB4CCA059FC4}" type="datetimeFigureOut">
               <a:rPr lang="en-US" smtClean="0"/>
-              <a:t>1/27/13</a:t>
+              <a:t>4/19/26</a:t>
             </a:fld>
             <a:endParaRPr lang="en-US"/>
           </a:p>
@@ -1098,7 +1226,7 @@
           <a:p>
             <a:fld id="{C1FF6DA9-008F-8B48-92A6-B652298478BF}" type="slidenum">
               <a:rPr lang="en-US" smtClean="0"/>
-              <a:t>‹#›</a:t>
+              <a:t>‹nr.›</a:t>
             </a:fld>
             <a:endParaRPr lang="en-US"/>
           </a:p>
@@ -1150,10 +1278,9 @@
           <a:lstStyle/>
           <a:p>
             <a:r>
-              <a:rPr lang="en-US" smtClean="0"/>
+              <a:rPr lang="en-US"/>
               <a:t>Click to edit Master title style</a:t>
             </a:r>
-            <a:endParaRPr lang="en-US"/>
           </a:p>
         </p:txBody>
       </p:sp>
@@ -1207,38 +1334,37 @@
           <a:p>
             <a:pPr lvl="0"/>
             <a:r>
-              <a:rPr lang="en-US" smtClean="0"/>
+              <a:rPr lang="en-US"/>
               <a:t>Click to edit Master text styles</a:t>
             </a:r>
           </a:p>
           <a:p>
             <a:pPr lvl="1"/>
             <a:r>
-              <a:rPr lang="en-US" smtClean="0"/>
+              <a:rPr lang="en-US"/>
               <a:t>Second level</a:t>
             </a:r>
           </a:p>
           <a:p>
             <a:pPr lvl="2"/>
             <a:r>
-              <a:rPr lang="en-US" smtClean="0"/>
+              <a:rPr lang="en-US"/>
               <a:t>Third level</a:t>
             </a:r>
           </a:p>
           <a:p>
             <a:pPr lvl="3"/>
             <a:r>
-              <a:rPr lang="en-US" smtClean="0"/>
+              <a:rPr lang="en-US"/>
               <a:t>Fourth level</a:t>
             </a:r>
           </a:p>
           <a:p>
             <a:pPr lvl="4"/>
             <a:r>
-              <a:rPr lang="en-US" smtClean="0"/>
+              <a:rPr lang="en-US"/>
               <a:t>Fifth level</a:t>
             </a:r>
-            <a:endParaRPr lang="en-US"/>
           </a:p>
         </p:txBody>
       </p:sp>
@@ -1292,38 +1418,37 @@
           <a:p>
             <a:pPr lvl="0"/>
             <a:r>
-              <a:rPr lang="en-US" smtClean="0"/>
+              <a:rPr lang="en-US"/>
               <a:t>Click to edit Master text styles</a:t>
             </a:r>
           </a:p>
           <a:p>
             <a:pPr lvl="1"/>
             <a:r>
-              <a:rPr lang="en-US" smtClean="0"/>
+              <a:rPr lang="en-US"/>
               <a:t>Second level</a:t>
             </a:r>
           </a:p>
           <a:p>
             <a:pPr lvl="2"/>
             <a:r>
-              <a:rPr lang="en-US" smtClean="0"/>
+              <a:rPr lang="en-US"/>
               <a:t>Third level</a:t>
             </a:r>
           </a:p>
           <a:p>
             <a:pPr lvl="3"/>
             <a:r>
-              <a:rPr lang="en-US" smtClean="0"/>
+              <a:rPr lang="en-US"/>
               <a:t>Fourth level</a:t>
             </a:r>
           </a:p>
           <a:p>
             <a:pPr lvl="4"/>
             <a:r>
-              <a:rPr lang="en-US" smtClean="0"/>
+              <a:rPr lang="en-US"/>
               <a:t>Fifth level</a:t>
             </a:r>
-            <a:endParaRPr lang="en-US"/>
           </a:p>
         </p:txBody>
       </p:sp>
@@ -1344,7 +1469,7 @@
           <a:p>
             <a:fld id="{5BCAD085-E8A6-8845-BD4E-CB4CCA059FC4}" type="datetimeFigureOut">
               <a:rPr lang="en-US" smtClean="0"/>
-              <a:t>1/27/13</a:t>
+              <a:t>4/19/26</a:t>
             </a:fld>
             <a:endParaRPr lang="en-US"/>
           </a:p>
@@ -1386,7 +1511,7 @@
           <a:p>
             <a:fld id="{C1FF6DA9-008F-8B48-92A6-B652298478BF}" type="slidenum">
               <a:rPr lang="en-US" smtClean="0"/>
-              <a:t>‹#›</a:t>
+              <a:t>‹nr.›</a:t>
             </a:fld>
             <a:endParaRPr lang="en-US"/>
           </a:p>
@@ -1442,10 +1567,9 @@
           </a:lstStyle>
           <a:p>
             <a:r>
-              <a:rPr lang="en-US" smtClean="0"/>
+              <a:rPr lang="en-US"/>
               <a:t>Click to edit Master title style</a:t>
             </a:r>
-            <a:endParaRPr lang="en-US"/>
           </a:p>
         </p:txBody>
       </p:sp>
@@ -1508,7 +1632,7 @@
           <a:p>
             <a:pPr lvl="0"/>
             <a:r>
-              <a:rPr lang="en-US" smtClean="0"/>
+              <a:rPr lang="en-US"/>
               <a:t>Click to edit Master text styles</a:t>
             </a:r>
           </a:p>
@@ -1564,38 +1688,37 @@
           <a:p>
             <a:pPr lvl="0"/>
             <a:r>
-              <a:rPr lang="en-US" smtClean="0"/>
+              <a:rPr lang="en-US"/>
               <a:t>Click to edit Master text styles</a:t>
             </a:r>
           </a:p>
           <a:p>
             <a:pPr lvl="1"/>
             <a:r>
-              <a:rPr lang="en-US" smtClean="0"/>
+              <a:rPr lang="en-US"/>
               <a:t>Second level</a:t>
             </a:r>
           </a:p>
           <a:p>
             <a:pPr lvl="2"/>
             <a:r>
-              <a:rPr lang="en-US" smtClean="0"/>
+              <a:rPr lang="en-US"/>
               <a:t>Third level</a:t>
             </a:r>
           </a:p>
           <a:p>
             <a:pPr lvl="3"/>
             <a:r>
-              <a:rPr lang="en-US" smtClean="0"/>
+              <a:rPr lang="en-US"/>
               <a:t>Fourth level</a:t>
             </a:r>
           </a:p>
           <a:p>
             <a:pPr lvl="4"/>
             <a:r>
-              <a:rPr lang="en-US" smtClean="0"/>
+              <a:rPr lang="en-US"/>
               <a:t>Fifth level</a:t>
             </a:r>
-            <a:endParaRPr lang="en-US"/>
           </a:p>
         </p:txBody>
       </p:sp>
@@ -1658,7 +1781,7 @@
           <a:p>
             <a:pPr lvl="0"/>
             <a:r>
-              <a:rPr lang="en-US" smtClean="0"/>
+              <a:rPr lang="en-US"/>
               <a:t>Click to edit Master text styles</a:t>
             </a:r>
           </a:p>
@@ -1714,38 +1837,37 @@
           <a:p>
             <a:pPr lvl="0"/>
             <a:r>
-              <a:rPr lang="en-US" smtClean="0"/>
+              <a:rPr lang="en-US"/>
               <a:t>Click to edit Master text styles</a:t>
             </a:r>
           </a:p>
           <a:p>
             <a:pPr lvl="1"/>
             <a:r>
-              <a:rPr lang="en-US" smtClean="0"/>
+              <a:rPr lang="en-US"/>
               <a:t>Second level</a:t>
             </a:r>
           </a:p>
           <a:p>
             <a:pPr lvl="2"/>
             <a:r>
-              <a:rPr lang="en-US" smtClean="0"/>
+              <a:rPr lang="en-US"/>
               <a:t>Third level</a:t>
             </a:r>
           </a:p>
           <a:p>
             <a:pPr lvl="3"/>
             <a:r>
-              <a:rPr lang="en-US" smtClean="0"/>
+              <a:rPr lang="en-US"/>
               <a:t>Fourth level</a:t>
             </a:r>
           </a:p>
           <a:p>
             <a:pPr lvl="4"/>
             <a:r>
-              <a:rPr lang="en-US" smtClean="0"/>
+              <a:rPr lang="en-US"/>
               <a:t>Fifth level</a:t>
             </a:r>
-            <a:endParaRPr lang="en-US"/>
           </a:p>
         </p:txBody>
       </p:sp>
@@ -1766,7 +1888,7 @@
           <a:p>
             <a:fld id="{5BCAD085-E8A6-8845-BD4E-CB4CCA059FC4}" type="datetimeFigureOut">
               <a:rPr lang="en-US" smtClean="0"/>
-              <a:t>1/27/13</a:t>
+              <a:t>4/19/26</a:t>
             </a:fld>
             <a:endParaRPr lang="en-US"/>
           </a:p>
@@ -1808,7 +1930,7 @@
           <a:p>
             <a:fld id="{C1FF6DA9-008F-8B48-92A6-B652298478BF}" type="slidenum">
               <a:rPr lang="en-US" smtClean="0"/>
-              <a:t>‹#›</a:t>
+              <a:t>‹nr.›</a:t>
             </a:fld>
             <a:endParaRPr lang="en-US"/>
           </a:p>
@@ -1860,10 +1982,9 @@
           <a:lstStyle/>
           <a:p>
             <a:r>
-              <a:rPr lang="en-US" smtClean="0"/>
+              <a:rPr lang="en-US"/>
               <a:t>Click to edit Master title style</a:t>
             </a:r>
-            <a:endParaRPr lang="en-US"/>
           </a:p>
         </p:txBody>
       </p:sp>
@@ -1884,7 +2005,7 @@
           <a:p>
             <a:fld id="{5BCAD085-E8A6-8845-BD4E-CB4CCA059FC4}" type="datetimeFigureOut">
               <a:rPr lang="en-US" smtClean="0"/>
-              <a:t>1/27/13</a:t>
+              <a:t>4/19/26</a:t>
             </a:fld>
             <a:endParaRPr lang="en-US"/>
           </a:p>
@@ -1926,7 +2047,7 @@
           <a:p>
             <a:fld id="{C1FF6DA9-008F-8B48-92A6-B652298478BF}" type="slidenum">
               <a:rPr lang="en-US" smtClean="0"/>
-              <a:t>‹#›</a:t>
+              <a:t>‹nr.›</a:t>
             </a:fld>
             <a:endParaRPr lang="en-US"/>
           </a:p>
@@ -1979,7 +2100,7 @@
           <a:p>
             <a:fld id="{5BCAD085-E8A6-8845-BD4E-CB4CCA059FC4}" type="datetimeFigureOut">
               <a:rPr lang="en-US" smtClean="0"/>
-              <a:t>1/27/13</a:t>
+              <a:t>4/19/26</a:t>
             </a:fld>
             <a:endParaRPr lang="en-US"/>
           </a:p>
@@ -2021,7 +2142,7 @@
           <a:p>
             <a:fld id="{C1FF6DA9-008F-8B48-92A6-B652298478BF}" type="slidenum">
               <a:rPr lang="en-US" smtClean="0"/>
-              <a:t>‹#›</a:t>
+              <a:t>‹nr.›</a:t>
             </a:fld>
             <a:endParaRPr lang="en-US"/>
           </a:p>
@@ -2082,10 +2203,9 @@
           </a:lstStyle>
           <a:p>
             <a:r>
-              <a:rPr lang="en-US" smtClean="0"/>
+              <a:rPr lang="en-US"/>
               <a:t>Click to edit Master title style</a:t>
             </a:r>
-            <a:endParaRPr lang="en-US"/>
           </a:p>
         </p:txBody>
       </p:sp>
@@ -2139,38 +2259,37 @@
           <a:p>
             <a:pPr lvl="0"/>
             <a:r>
-              <a:rPr lang="en-US" smtClean="0"/>
+              <a:rPr lang="en-US"/>
               <a:t>Click to edit Master text styles</a:t>
             </a:r>
           </a:p>
           <a:p>
             <a:pPr lvl="1"/>
             <a:r>
-              <a:rPr lang="en-US" smtClean="0"/>
+              <a:rPr lang="en-US"/>
               <a:t>Second level</a:t>
             </a:r>
           </a:p>
           <a:p>
             <a:pPr lvl="2"/>
             <a:r>
-              <a:rPr lang="en-US" smtClean="0"/>
+              <a:rPr lang="en-US"/>
               <a:t>Third level</a:t>
             </a:r>
           </a:p>
           <a:p>
             <a:pPr lvl="3"/>
             <a:r>
-              <a:rPr lang="en-US" smtClean="0"/>
+              <a:rPr lang="en-US"/>
               <a:t>Fourth level</a:t>
             </a:r>
           </a:p>
           <a:p>
             <a:pPr lvl="4"/>
             <a:r>
-              <a:rPr lang="en-US" smtClean="0"/>
+              <a:rPr lang="en-US"/>
               <a:t>Fifth level</a:t>
             </a:r>
-            <a:endParaRPr lang="en-US"/>
           </a:p>
         </p:txBody>
       </p:sp>
@@ -2233,7 +2352,7 @@
           <a:p>
             <a:pPr lvl="0"/>
             <a:r>
-              <a:rPr lang="en-US" smtClean="0"/>
+              <a:rPr lang="en-US"/>
               <a:t>Click to edit Master text styles</a:t>
             </a:r>
           </a:p>
@@ -2256,7 +2375,7 @@
           <a:p>
             <a:fld id="{5BCAD085-E8A6-8845-BD4E-CB4CCA059FC4}" type="datetimeFigureOut">
               <a:rPr lang="en-US" smtClean="0"/>
-              <a:t>1/27/13</a:t>
+              <a:t>4/19/26</a:t>
             </a:fld>
             <a:endParaRPr lang="en-US"/>
           </a:p>
@@ -2298,7 +2417,7 @@
           <a:p>
             <a:fld id="{C1FF6DA9-008F-8B48-92A6-B652298478BF}" type="slidenum">
               <a:rPr lang="en-US" smtClean="0"/>
-              <a:t>‹#›</a:t>
+              <a:t>‹nr.›</a:t>
             </a:fld>
             <a:endParaRPr lang="en-US"/>
           </a:p>
@@ -2359,10 +2478,9 @@
           </a:lstStyle>
           <a:p>
             <a:r>
-              <a:rPr lang="en-US" smtClean="0"/>
+              <a:rPr lang="en-US"/>
               <a:t>Click to edit Master title style</a:t>
             </a:r>
-            <a:endParaRPr lang="en-US"/>
           </a:p>
         </p:txBody>
       </p:sp>
@@ -2486,7 +2604,7 @@
           <a:p>
             <a:pPr lvl="0"/>
             <a:r>
-              <a:rPr lang="en-US" smtClean="0"/>
+              <a:rPr lang="en-US"/>
               <a:t>Click to edit Master text styles</a:t>
             </a:r>
           </a:p>
@@ -2509,7 +2627,7 @@
           <a:p>
             <a:fld id="{5BCAD085-E8A6-8845-BD4E-CB4CCA059FC4}" type="datetimeFigureOut">
               <a:rPr lang="en-US" smtClean="0"/>
-              <a:t>1/27/13</a:t>
+              <a:t>4/19/26</a:t>
             </a:fld>
             <a:endParaRPr lang="en-US"/>
           </a:p>
@@ -2551,7 +2669,7 @@
           <a:p>
             <a:fld id="{C1FF6DA9-008F-8B48-92A6-B652298478BF}" type="slidenum">
               <a:rPr lang="en-US" smtClean="0"/>
-              <a:t>‹#›</a:t>
+              <a:t>‹nr.›</a:t>
             </a:fld>
             <a:endParaRPr lang="en-US"/>
           </a:p>
@@ -2618,10 +2736,9 @@
           <a:lstStyle/>
           <a:p>
             <a:r>
-              <a:rPr lang="en-US" smtClean="0"/>
+              <a:rPr lang="en-US"/>
               <a:t>Click to edit Master title style</a:t>
             </a:r>
-            <a:endParaRPr lang="en-US"/>
           </a:p>
         </p:txBody>
       </p:sp>
@@ -2652,38 +2769,37 @@
           <a:p>
             <a:pPr lvl="0"/>
             <a:r>
-              <a:rPr lang="en-US" smtClean="0"/>
+              <a:rPr lang="en-US"/>
               <a:t>Click to edit Master text styles</a:t>
             </a:r>
           </a:p>
           <a:p>
             <a:pPr lvl="1"/>
             <a:r>
-              <a:rPr lang="en-US" smtClean="0"/>
+              <a:rPr lang="en-US"/>
               <a:t>Second level</a:t>
             </a:r>
           </a:p>
           <a:p>
             <a:pPr lvl="2"/>
             <a:r>
-              <a:rPr lang="en-US" smtClean="0"/>
+              <a:rPr lang="en-US"/>
               <a:t>Third level</a:t>
             </a:r>
           </a:p>
           <a:p>
             <a:pPr lvl="3"/>
             <a:r>
-              <a:rPr lang="en-US" smtClean="0"/>
+              <a:rPr lang="en-US"/>
               <a:t>Fourth level</a:t>
             </a:r>
           </a:p>
           <a:p>
             <a:pPr lvl="4"/>
             <a:r>
-              <a:rPr lang="en-US" smtClean="0"/>
+              <a:rPr lang="en-US"/>
               <a:t>Fifth level</a:t>
             </a:r>
-            <a:endParaRPr lang="en-US"/>
           </a:p>
         </p:txBody>
       </p:sp>
@@ -2722,7 +2838,7 @@
           <a:p>
             <a:fld id="{5BCAD085-E8A6-8845-BD4E-CB4CCA059FC4}" type="datetimeFigureOut">
               <a:rPr lang="en-US" smtClean="0"/>
-              <a:t>1/27/13</a:t>
+              <a:t>4/19/26</a:t>
             </a:fld>
             <a:endParaRPr lang="en-US"/>
           </a:p>
@@ -2800,7 +2916,7 @@
           <a:p>
             <a:fld id="{C1FF6DA9-008F-8B48-92A6-B652298478BF}" type="slidenum">
               <a:rPr lang="en-US" smtClean="0"/>
-              <a:t>‹#›</a:t>
+              <a:t>‹nr.›</a:t>
             </a:fld>
             <a:endParaRPr lang="en-US"/>
           </a:p>
@@ -3081,7 +3197,7 @@
 </file>
 
 <file path=ppt/slides/slide1.xml><?xml version="1.0" encoding="utf-8"?>
-<p:sld xmlns:a="http://schemas.openxmlformats.org/drawingml/2006/main" xmlns:p="http://schemas.openxmlformats.org/presentationml/2006/main" xmlns:r="http://schemas.openxmlformats.org/officeDocument/2006/relationships">
+<p:sld xmlns:a="http://schemas.openxmlformats.org/drawingml/2006/main" xmlns:r="http://schemas.openxmlformats.org/officeDocument/2006/relationships" xmlns:p="http://schemas.openxmlformats.org/presentationml/2006/main">
   <p:cSld>
     <p:spTree>
       <p:nvGrpSpPr>
@@ -3089,7 +3205,14 @@
         <p:cNvGrpSpPr/>
         <p:nvPr/>
       </p:nvGrpSpPr>
-      <p:grpSpPr/>
+      <p:grpSpPr>
+        <a:xfrm>
+          <a:off x="0" y="0"/>
+          <a:ext cx="0" cy="0"/>
+          <a:chOff x="0" y="0"/>
+          <a:chExt cx="0" cy="0"/>
+        </a:xfrm>
+      </p:grpSpPr>
       <p:sp>
         <p:nvSpPr>
           <p:cNvPr id="2" name="Rectangle 1"/>
@@ -3098,7 +3221,7 @@
         </p:nvSpPr>
         <p:spPr>
           <a:xfrm>
-            <a:off x="0" y="0"/>
+            <a:off x="-13716" y="0"/>
             <a:ext cx="12188952" cy="6858000"/>
           </a:xfrm>
           <a:prstGeom prst="rect">
@@ -3130,6 +3253,7 @@
           <a:lstStyle/>
           <a:p>
             <a:pPr algn="ctr"/>
+            <a:endParaRPr dirty="0"/>
           </a:p>
         </p:txBody>
       </p:sp>
@@ -3141,8 +3265,8 @@
         </p:nvSpPr>
         <p:spPr>
           <a:xfrm>
-            <a:off x="548640" y="411480"/>
-            <a:ext cx="274320" cy="36576"/>
+            <a:off x="0" y="2011680"/>
+            <a:ext cx="411480" cy="2834640"/>
           </a:xfrm>
           <a:prstGeom prst="rect">
             <a:avLst/>
@@ -3173,19 +3297,64 @@
           <a:lstStyle/>
           <a:p>
             <a:pPr algn="ctr"/>
-          </a:p>
-        </p:txBody>
-      </p:sp>
-      <p:sp>
-        <p:nvSpPr>
-          <p:cNvPr id="4" name="TextBox 3"/>
+            <a:endParaRPr/>
+          </a:p>
+        </p:txBody>
+      </p:sp>
+      <p:sp>
+        <p:nvSpPr>
+          <p:cNvPr id="4" name="Rectangle 3"/>
+          <p:cNvSpPr/>
+          <p:nvPr/>
+        </p:nvSpPr>
+        <p:spPr>
+          <a:xfrm>
+            <a:off x="914400" y="868680"/>
+            <a:ext cx="457200" cy="73152"/>
+          </a:xfrm>
+          <a:prstGeom prst="rect">
+            <a:avLst/>
+          </a:prstGeom>
+          <a:solidFill>
+            <a:srgbClr val="F59E0B"/>
+          </a:solidFill>
+          <a:ln>
+            <a:noFill/>
+          </a:ln>
+        </p:spPr>
+        <p:style>
+          <a:lnRef idx="1">
+            <a:schemeClr val="accent1"/>
+          </a:lnRef>
+          <a:fillRef idx="3">
+            <a:schemeClr val="accent1"/>
+          </a:fillRef>
+          <a:effectRef idx="2">
+            <a:schemeClr val="accent1"/>
+          </a:effectRef>
+          <a:fontRef idx="minor">
+            <a:schemeClr val="lt1"/>
+          </a:fontRef>
+        </p:style>
+        <p:txBody>
+          <a:bodyPr rtlCol="0" anchor="ctr"/>
+          <a:lstStyle/>
+          <a:p>
+            <a:pPr algn="ctr"/>
+            <a:endParaRPr/>
+          </a:p>
+        </p:txBody>
+      </p:sp>
+      <p:sp>
+        <p:nvSpPr>
+          <p:cNvPr id="5" name="TextBox 4"/>
           <p:cNvSpPr txBox="1"/>
           <p:nvPr/>
         </p:nvSpPr>
         <p:spPr>
           <a:xfrm>
-            <a:off x="914400" y="347472"/>
-            <a:ext cx="5486400" cy="274320"/>
+            <a:off x="1508760" y="749808"/>
+            <a:ext cx="7315200" cy="215444"/>
           </a:xfrm>
           <a:prstGeom prst="rect">
             <a:avLst/>
@@ -3193,34 +3362,34 @@
           <a:noFill/>
         </p:spPr>
         <p:txBody>
-          <a:bodyPr wrap="square" lIns="0" rIns="0" tIns="0" bIns="0">
+          <a:bodyPr wrap="square" lIns="0" tIns="0" rIns="0" bIns="0">
             <a:spAutoFit/>
           </a:bodyPr>
           <a:lstStyle/>
           <a:p>
             <a:pPr algn="l"/>
             <a:r>
-              <a:rPr sz="900" b="1">
+              <a:rPr sz="1400" b="1" dirty="0">
                 <a:solidFill>
                   <a:srgbClr val="F59E0B"/>
                 </a:solidFill>
                 <a:latin typeface="Calibri"/>
               </a:rPr>
-              <a:t>PIVOT · AURORA</a:t>
-            </a:r>
-          </a:p>
-        </p:txBody>
-      </p:sp>
-      <p:sp>
-        <p:nvSpPr>
-          <p:cNvPr id="5" name="TextBox 4"/>
+              <a:t>INNOVATIEMANAGEMENT</a:t>
+            </a:r>
+          </a:p>
+        </p:txBody>
+      </p:sp>
+      <p:sp>
+        <p:nvSpPr>
+          <p:cNvPr id="6" name="TextBox 5"/>
           <p:cNvSpPr txBox="1"/>
           <p:nvPr/>
         </p:nvSpPr>
         <p:spPr>
           <a:xfrm>
-            <a:off x="548640" y="566928"/>
-            <a:ext cx="10058400" cy="822960"/>
+            <a:off x="914400" y="2011680"/>
+            <a:ext cx="10515600" cy="1097280"/>
           </a:xfrm>
           <a:prstGeom prst="rect">
             <a:avLst/>
@@ -3228,34 +3397,34 @@
           <a:noFill/>
         </p:spPr>
         <p:txBody>
-          <a:bodyPr wrap="square" lIns="0" rIns="0" tIns="0" bIns="0">
+          <a:bodyPr wrap="square" lIns="0" tIns="0" rIns="0" bIns="0">
             <a:spAutoFit/>
           </a:bodyPr>
           <a:lstStyle/>
           <a:p>
             <a:pPr algn="l"/>
             <a:r>
-              <a:rPr sz="2800" b="1">
-                <a:solidFill>
-                  <a:srgbClr val="2D2938"/>
-                </a:solidFill>
-                <a:latin typeface="Calibri"/>
-              </a:rPr>
-              <a:t>Van natte handtekening naar gekoppelde identiteit</a:t>
-            </a:r>
-          </a:p>
-        </p:txBody>
-      </p:sp>
-      <p:sp>
-        <p:nvSpPr>
-          <p:cNvPr id="6" name="TextBox 5"/>
+              <a:rPr sz="7200" b="1">
+                <a:solidFill>
+                  <a:srgbClr val="2D2938"/>
+                </a:solidFill>
+                <a:latin typeface="Calibri"/>
+              </a:rPr>
+              <a:t>Aurora</a:t>
+            </a:r>
+          </a:p>
+        </p:txBody>
+      </p:sp>
+      <p:sp>
+        <p:nvSpPr>
+          <p:cNvPr id="7" name="TextBox 6"/>
           <p:cNvSpPr txBox="1"/>
           <p:nvPr/>
         </p:nvSpPr>
         <p:spPr>
           <a:xfrm>
-            <a:off x="548640" y="1234440"/>
-            <a:ext cx="10058400" cy="365760"/>
+            <a:off x="914400" y="2880360"/>
+            <a:ext cx="10515600" cy="914400"/>
           </a:xfrm>
           <a:prstGeom prst="rect">
             <a:avLst/>
@@ -3263,14 +3432,416 @@
           <a:noFill/>
         </p:spPr>
         <p:txBody>
-          <a:bodyPr wrap="square" lIns="0" rIns="0" tIns="0" bIns="0">
+          <a:bodyPr wrap="square" lIns="0" tIns="0" rIns="0" bIns="0">
             <a:spAutoFit/>
           </a:bodyPr>
           <a:lstStyle/>
           <a:p>
             <a:pPr algn="l"/>
             <a:r>
+              <a:rPr sz="5200" b="1">
+                <a:solidFill>
+                  <a:srgbClr val="F59E0B"/>
+                </a:solidFill>
+                <a:latin typeface="Calibri"/>
+              </a:rPr>
+              <a:t>Beyond Paper</a:t>
+            </a:r>
+          </a:p>
+        </p:txBody>
+      </p:sp>
+      <p:sp>
+        <p:nvSpPr>
+          <p:cNvPr id="8" name="TextBox 7"/>
+          <p:cNvSpPr txBox="1"/>
+          <p:nvPr/>
+        </p:nvSpPr>
+        <p:spPr>
+          <a:xfrm>
+            <a:off x="914400" y="3977639"/>
+            <a:ext cx="10515600" cy="731520"/>
+          </a:xfrm>
+          <a:prstGeom prst="rect">
+            <a:avLst/>
+          </a:prstGeom>
+          <a:noFill/>
+        </p:spPr>
+        <p:txBody>
+          <a:bodyPr wrap="square" lIns="0" tIns="0" rIns="0" bIns="0">
+            <a:spAutoFit/>
+          </a:bodyPr>
+          <a:lstStyle/>
+          <a:p>
+            <a:pPr algn="l"/>
+            <a:r>
+              <a:rPr sz="2200" b="0">
+                <a:solidFill>
+                  <a:srgbClr val="2D2938"/>
+                </a:solidFill>
+                <a:latin typeface="Calibri"/>
+              </a:rPr>
+              <a:t>De pivot: van natte handtekening naar gekoppelde identiteit</a:t>
+            </a:r>
+          </a:p>
+        </p:txBody>
+      </p:sp>
+      <p:sp>
+        <p:nvSpPr>
+          <p:cNvPr id="9" name="Rectangle 8"/>
+          <p:cNvSpPr/>
+          <p:nvPr/>
+        </p:nvSpPr>
+        <p:spPr>
+          <a:xfrm>
+            <a:off x="914400" y="4983480"/>
+            <a:ext cx="3200400" cy="27432"/>
+          </a:xfrm>
+          <a:prstGeom prst="rect">
+            <a:avLst/>
+          </a:prstGeom>
+          <a:solidFill>
+            <a:srgbClr val="2D2938"/>
+          </a:solidFill>
+          <a:ln>
+            <a:noFill/>
+          </a:ln>
+        </p:spPr>
+        <p:style>
+          <a:lnRef idx="1">
+            <a:schemeClr val="accent1"/>
+          </a:lnRef>
+          <a:fillRef idx="3">
+            <a:schemeClr val="accent1"/>
+          </a:fillRef>
+          <a:effectRef idx="2">
+            <a:schemeClr val="accent1"/>
+          </a:effectRef>
+          <a:fontRef idx="minor">
+            <a:schemeClr val="lt1"/>
+          </a:fontRef>
+        </p:style>
+        <p:txBody>
+          <a:bodyPr rtlCol="0" anchor="ctr"/>
+          <a:lstStyle/>
+          <a:p>
+            <a:pPr algn="ctr"/>
+            <a:endParaRPr/>
+          </a:p>
+        </p:txBody>
+      </p:sp>
+      <p:sp>
+        <p:nvSpPr>
+          <p:cNvPr id="10" name="TextBox 9"/>
+          <p:cNvSpPr txBox="1"/>
+          <p:nvPr/>
+        </p:nvSpPr>
+        <p:spPr>
+          <a:xfrm>
+            <a:off x="914400" y="5166360"/>
+            <a:ext cx="10058400" cy="365760"/>
+          </a:xfrm>
+          <a:prstGeom prst="rect">
+            <a:avLst/>
+          </a:prstGeom>
+          <a:noFill/>
+        </p:spPr>
+        <p:txBody>
+          <a:bodyPr wrap="square" lIns="0" tIns="0" rIns="0" bIns="0">
+            <a:spAutoFit/>
+          </a:bodyPr>
+          <a:lstStyle/>
+          <a:p>
+            <a:pPr algn="l"/>
+            <a:r>
+              <a:rPr sz="1600" b="0">
+                <a:solidFill>
+                  <a:srgbClr val="2D2938"/>
+                </a:solidFill>
+                <a:latin typeface="Calibri"/>
+              </a:rPr>
+              <a:t>Anke Maassen van den Brink  ·  Lianne van Os  ·  Jr Bouwman</a:t>
+            </a:r>
+          </a:p>
+        </p:txBody>
+      </p:sp>
+      <p:sp>
+        <p:nvSpPr>
+          <p:cNvPr id="11" name="TextBox 10"/>
+          <p:cNvSpPr txBox="1"/>
+          <p:nvPr/>
+        </p:nvSpPr>
+        <p:spPr>
+          <a:xfrm>
+            <a:off x="914400" y="5577840"/>
+            <a:ext cx="10058400" cy="365760"/>
+          </a:xfrm>
+          <a:prstGeom prst="rect">
+            <a:avLst/>
+          </a:prstGeom>
+          <a:noFill/>
+        </p:spPr>
+        <p:txBody>
+          <a:bodyPr wrap="square" lIns="0" tIns="0" rIns="0" bIns="0">
+            <a:spAutoFit/>
+          </a:bodyPr>
+          <a:lstStyle/>
+          <a:p>
+            <a:pPr algn="l"/>
+            <a:r>
               <a:rPr sz="1300" b="0">
+                <a:solidFill>
+                  <a:srgbClr val="6B6173"/>
+                </a:solidFill>
+                <a:latin typeface="Calibri"/>
+              </a:rPr>
+              <a:t>Technische Bedrijfskunde  ·  Windesheim  ·  2025–2026</a:t>
+            </a:r>
+          </a:p>
+        </p:txBody>
+      </p:sp>
+      <p:sp>
+        <p:nvSpPr>
+          <p:cNvPr id="12" name="TextBox 11"/>
+          <p:cNvSpPr txBox="1"/>
+          <p:nvPr/>
+        </p:nvSpPr>
+        <p:spPr>
+          <a:xfrm>
+            <a:off x="457200" y="6355080"/>
+            <a:ext cx="11247120" cy="320040"/>
+          </a:xfrm>
+          <a:prstGeom prst="rect">
+            <a:avLst/>
+          </a:prstGeom>
+          <a:noFill/>
+        </p:spPr>
+        <p:txBody>
+          <a:bodyPr wrap="square" lIns="0" tIns="0" rIns="0" bIns="0">
+            <a:spAutoFit/>
+          </a:bodyPr>
+          <a:lstStyle/>
+          <a:p>
+            <a:pPr algn="r"/>
+            <a:r>
+              <a:rPr sz="1100" b="0">
+                <a:solidFill>
+                  <a:srgbClr val="6B6173"/>
+                </a:solidFill>
+                <a:latin typeface="Calibri"/>
+              </a:rPr>
+              <a:t>Casus: Aurora Writing Instruments Group</a:t>
+            </a:r>
+          </a:p>
+        </p:txBody>
+      </p:sp>
+    </p:spTree>
+  </p:cSld>
+  <p:clrMapOvr>
+    <a:masterClrMapping/>
+  </p:clrMapOvr>
+</p:sld>
+</file>
+
+<file path=ppt/slides/slide2.xml><?xml version="1.0" encoding="utf-8"?>
+<p:sld xmlns:a="http://schemas.openxmlformats.org/drawingml/2006/main" xmlns:r="http://schemas.openxmlformats.org/officeDocument/2006/relationships" xmlns:p="http://schemas.openxmlformats.org/presentationml/2006/main">
+  <p:cSld>
+    <p:spTree>
+      <p:nvGrpSpPr>
+        <p:cNvPr id="1" name=""/>
+        <p:cNvGrpSpPr/>
+        <p:nvPr/>
+      </p:nvGrpSpPr>
+      <p:grpSpPr>
+        <a:xfrm>
+          <a:off x="0" y="0"/>
+          <a:ext cx="0" cy="0"/>
+          <a:chOff x="0" y="0"/>
+          <a:chExt cx="0" cy="0"/>
+        </a:xfrm>
+      </p:grpSpPr>
+      <p:sp>
+        <p:nvSpPr>
+          <p:cNvPr id="2" name="Rectangle 1"/>
+          <p:cNvSpPr/>
+          <p:nvPr/>
+        </p:nvSpPr>
+        <p:spPr>
+          <a:xfrm>
+            <a:off x="0" y="0"/>
+            <a:ext cx="12188952" cy="6858000"/>
+          </a:xfrm>
+          <a:prstGeom prst="rect">
+            <a:avLst/>
+          </a:prstGeom>
+          <a:solidFill>
+            <a:srgbClr val="F8F5EF"/>
+          </a:solidFill>
+          <a:ln>
+            <a:noFill/>
+          </a:ln>
+        </p:spPr>
+        <p:style>
+          <a:lnRef idx="1">
+            <a:schemeClr val="accent1"/>
+          </a:lnRef>
+          <a:fillRef idx="3">
+            <a:schemeClr val="accent1"/>
+          </a:fillRef>
+          <a:effectRef idx="2">
+            <a:schemeClr val="accent1"/>
+          </a:effectRef>
+          <a:fontRef idx="minor">
+            <a:schemeClr val="lt1"/>
+          </a:fontRef>
+        </p:style>
+        <p:txBody>
+          <a:bodyPr rtlCol="0" anchor="ctr"/>
+          <a:lstStyle/>
+          <a:p>
+            <a:pPr algn="ctr"/>
+            <a:endParaRPr/>
+          </a:p>
+        </p:txBody>
+      </p:sp>
+      <p:sp>
+        <p:nvSpPr>
+          <p:cNvPr id="3" name="Rectangle 2"/>
+          <p:cNvSpPr/>
+          <p:nvPr/>
+        </p:nvSpPr>
+        <p:spPr>
+          <a:xfrm>
+            <a:off x="548640" y="411480"/>
+            <a:ext cx="365760" cy="54864"/>
+          </a:xfrm>
+          <a:prstGeom prst="rect">
+            <a:avLst/>
+          </a:prstGeom>
+          <a:solidFill>
+            <a:srgbClr val="F59E0B"/>
+          </a:solidFill>
+          <a:ln>
+            <a:noFill/>
+          </a:ln>
+        </p:spPr>
+        <p:style>
+          <a:lnRef idx="1">
+            <a:schemeClr val="accent1"/>
+          </a:lnRef>
+          <a:fillRef idx="3">
+            <a:schemeClr val="accent1"/>
+          </a:fillRef>
+          <a:effectRef idx="2">
+            <a:schemeClr val="accent1"/>
+          </a:effectRef>
+          <a:fontRef idx="minor">
+            <a:schemeClr val="lt1"/>
+          </a:fontRef>
+        </p:style>
+        <p:txBody>
+          <a:bodyPr rtlCol="0" anchor="ctr"/>
+          <a:lstStyle/>
+          <a:p>
+            <a:pPr algn="ctr"/>
+            <a:endParaRPr/>
+          </a:p>
+        </p:txBody>
+      </p:sp>
+      <p:sp>
+        <p:nvSpPr>
+          <p:cNvPr id="4" name="TextBox 3"/>
+          <p:cNvSpPr txBox="1"/>
+          <p:nvPr/>
+        </p:nvSpPr>
+        <p:spPr>
+          <a:xfrm>
+            <a:off x="1005840" y="329184"/>
+            <a:ext cx="5486400" cy="274320"/>
+          </a:xfrm>
+          <a:prstGeom prst="rect">
+            <a:avLst/>
+          </a:prstGeom>
+          <a:noFill/>
+        </p:spPr>
+        <p:txBody>
+          <a:bodyPr wrap="square" lIns="0" tIns="0" rIns="0" bIns="0">
+            <a:spAutoFit/>
+          </a:bodyPr>
+          <a:lstStyle/>
+          <a:p>
+            <a:pPr algn="l"/>
+            <a:r>
+              <a:rPr sz="1200" b="1">
+                <a:solidFill>
+                  <a:srgbClr val="F59E0B"/>
+                </a:solidFill>
+                <a:latin typeface="Calibri"/>
+              </a:rPr>
+              <a:t>PIVOT · AURORA</a:t>
+            </a:r>
+          </a:p>
+        </p:txBody>
+      </p:sp>
+      <p:sp>
+        <p:nvSpPr>
+          <p:cNvPr id="5" name="TextBox 4"/>
+          <p:cNvSpPr txBox="1"/>
+          <p:nvPr/>
+        </p:nvSpPr>
+        <p:spPr>
+          <a:xfrm>
+            <a:off x="548640" y="566928"/>
+            <a:ext cx="10058400" cy="914400"/>
+          </a:xfrm>
+          <a:prstGeom prst="rect">
+            <a:avLst/>
+          </a:prstGeom>
+          <a:noFill/>
+        </p:spPr>
+        <p:txBody>
+          <a:bodyPr wrap="square" lIns="0" tIns="0" rIns="0" bIns="0">
+            <a:spAutoFit/>
+          </a:bodyPr>
+          <a:lstStyle/>
+          <a:p>
+            <a:pPr algn="l"/>
+            <a:r>
+              <a:rPr sz="3400" b="1">
+                <a:solidFill>
+                  <a:srgbClr val="2D2938"/>
+                </a:solidFill>
+                <a:latin typeface="Calibri"/>
+              </a:rPr>
+              <a:t>Van natte handtekening naar gekoppelde identiteit</a:t>
+            </a:r>
+          </a:p>
+        </p:txBody>
+      </p:sp>
+      <p:sp>
+        <p:nvSpPr>
+          <p:cNvPr id="6" name="TextBox 5"/>
+          <p:cNvSpPr txBox="1"/>
+          <p:nvPr/>
+        </p:nvSpPr>
+        <p:spPr>
+          <a:xfrm>
+            <a:off x="548640" y="1417320"/>
+            <a:ext cx="10058400" cy="365760"/>
+          </a:xfrm>
+          <a:prstGeom prst="rect">
+            <a:avLst/>
+          </a:prstGeom>
+          <a:noFill/>
+        </p:spPr>
+        <p:txBody>
+          <a:bodyPr wrap="square" lIns="0" tIns="0" rIns="0" bIns="0">
+            <a:spAutoFit/>
+          </a:bodyPr>
+          <a:lstStyle/>
+          <a:p>
+            <a:pPr algn="l"/>
+            <a:r>
+              <a:rPr sz="1700" b="0">
                 <a:solidFill>
                   <a:srgbClr val="6B6173"/>
                 </a:solidFill>
@@ -3297,8 +3868,8 @@
         </p:blipFill>
         <p:spPr>
           <a:xfrm>
-            <a:off x="548640" y="1783080"/>
-            <a:ext cx="11064240" cy="6638544"/>
+            <a:off x="2543503" y="1693229"/>
+            <a:ext cx="8455551" cy="5073331"/>
           </a:xfrm>
           <a:prstGeom prst="rect">
             <a:avLst/>
@@ -3313,8 +3884,8 @@
         </p:nvSpPr>
         <p:spPr>
           <a:xfrm>
-            <a:off x="548640" y="6492240"/>
-            <a:ext cx="7315200" cy="228600"/>
+            <a:off x="548640" y="6537960"/>
+            <a:ext cx="7315200" cy="169277"/>
           </a:xfrm>
           <a:prstGeom prst="rect">
             <a:avLst/>
@@ -3322,20 +3893,20 @@
           <a:noFill/>
         </p:spPr>
         <p:txBody>
-          <a:bodyPr wrap="square" lIns="0" rIns="0" tIns="0" bIns="0">
+          <a:bodyPr wrap="square" lIns="0" tIns="0" rIns="0" bIns="0">
             <a:spAutoFit/>
           </a:bodyPr>
           <a:lstStyle/>
           <a:p>
             <a:pPr algn="l"/>
             <a:r>
-              <a:rPr sz="900" b="0">
+              <a:rPr sz="1100" b="0" dirty="0">
                 <a:solidFill>
                   <a:srgbClr val="6B6173"/>
                 </a:solidFill>
                 <a:latin typeface="Calibri"/>
               </a:rPr>
-              <a:t>Anke · Lianne · Jr  ·  EDIM.21</a:t>
+              <a:t>Anke · Lianne · Jr </a:t>
             </a:r>
           </a:p>
         </p:txBody>
@@ -3348,8 +3919,8 @@
 </p:sld>
 </file>
 
-<file path=ppt/slides/slide2.xml><?xml version="1.0" encoding="utf-8"?>
-<p:sld xmlns:a="http://schemas.openxmlformats.org/drawingml/2006/main" xmlns:p="http://schemas.openxmlformats.org/presentationml/2006/main" xmlns:r="http://schemas.openxmlformats.org/officeDocument/2006/relationships">
+<file path=ppt/slides/slide3.xml><?xml version="1.0" encoding="utf-8"?>
+<p:sld xmlns:a="http://schemas.openxmlformats.org/drawingml/2006/main" xmlns:r="http://schemas.openxmlformats.org/officeDocument/2006/relationships" xmlns:p="http://schemas.openxmlformats.org/presentationml/2006/main">
   <p:cSld>
     <p:spTree>
       <p:nvGrpSpPr>
@@ -3357,7 +3928,14 @@
         <p:cNvGrpSpPr/>
         <p:nvPr/>
       </p:nvGrpSpPr>
-      <p:grpSpPr/>
+      <p:grpSpPr>
+        <a:xfrm>
+          <a:off x="0" y="0"/>
+          <a:ext cx="0" cy="0"/>
+          <a:chOff x="0" y="0"/>
+          <a:chExt cx="0" cy="0"/>
+        </a:xfrm>
+      </p:grpSpPr>
       <p:sp>
         <p:nvSpPr>
           <p:cNvPr id="2" name="Rectangle 1"/>
@@ -3366,7 +3944,7 @@
         </p:nvSpPr>
         <p:spPr>
           <a:xfrm>
-            <a:off x="0" y="0"/>
+            <a:off x="-127" y="-22071"/>
             <a:ext cx="12188952" cy="6858000"/>
           </a:xfrm>
           <a:prstGeom prst="rect">
@@ -3398,6 +3976,7 @@
           <a:lstStyle/>
           <a:p>
             <a:pPr algn="ctr"/>
+            <a:endParaRPr/>
           </a:p>
         </p:txBody>
       </p:sp>
@@ -3410,7 +3989,7 @@
         <p:spPr>
           <a:xfrm>
             <a:off x="548640" y="411480"/>
-            <a:ext cx="274320" cy="36576"/>
+            <a:ext cx="365760" cy="54864"/>
           </a:xfrm>
           <a:prstGeom prst="rect">
             <a:avLst/>
@@ -3441,6 +4020,7 @@
           <a:lstStyle/>
           <a:p>
             <a:pPr algn="ctr"/>
+            <a:endParaRPr/>
           </a:p>
         </p:txBody>
       </p:sp>
@@ -3452,8 +4032,8 @@
         </p:nvSpPr>
         <p:spPr>
           <a:xfrm>
-            <a:off x="914400" y="347472"/>
-            <a:ext cx="5486400" cy="274320"/>
+            <a:off x="1005840" y="329184"/>
+            <a:ext cx="7315200" cy="274320"/>
           </a:xfrm>
           <a:prstGeom prst="rect">
             <a:avLst/>
@@ -3461,20 +4041,20 @@
           <a:noFill/>
         </p:spPr>
         <p:txBody>
-          <a:bodyPr wrap="square" lIns="0" rIns="0" tIns="0" bIns="0">
+          <a:bodyPr wrap="square" lIns="0" tIns="0" rIns="0" bIns="0">
             <a:spAutoFit/>
           </a:bodyPr>
           <a:lstStyle/>
           <a:p>
             <a:pPr algn="l"/>
             <a:r>
-              <a:rPr sz="900" b="1">
+              <a:rPr sz="1200" b="1">
                 <a:solidFill>
                   <a:srgbClr val="F59E0B"/>
                 </a:solidFill>
                 <a:latin typeface="Calibri"/>
               </a:rPr>
-              <a:t>ANALYSE · DEEL 1</a:t>
+              <a:t>VALUE PROPOSITION CANVAS</a:t>
             </a:r>
           </a:p>
         </p:txBody>
@@ -3488,7 +4068,7 @@
         <p:spPr>
           <a:xfrm>
             <a:off x="548640" y="566928"/>
-            <a:ext cx="10058400" cy="548640"/>
+            <a:ext cx="10058400" cy="640080"/>
           </a:xfrm>
           <a:prstGeom prst="rect">
             <a:avLst/>
@@ -3496,46 +4076,114 @@
           <a:noFill/>
         </p:spPr>
         <p:txBody>
-          <a:bodyPr wrap="square" lIns="0" rIns="0" tIns="0" bIns="0">
+          <a:bodyPr wrap="square" lIns="0" tIns="0" rIns="0" bIns="0">
             <a:spAutoFit/>
           </a:bodyPr>
           <a:lstStyle/>
           <a:p>
             <a:pPr algn="l"/>
             <a:r>
-              <a:rPr sz="2600" b="1">
-                <a:solidFill>
-                  <a:srgbClr val="2D2938"/>
-                </a:solidFill>
-                <a:latin typeface="Calibri"/>
-              </a:rPr>
-              <a:t>Strategisch &amp; technisch</a:t>
-            </a:r>
-          </a:p>
-        </p:txBody>
-      </p:sp>
-      <p:sp>
-        <p:nvSpPr>
-          <p:cNvPr id="6" name="Rounded Rectangle 5"/>
+              <a:rPr sz="3000" b="1">
+                <a:solidFill>
+                  <a:srgbClr val="2D2938"/>
+                </a:solidFill>
+                <a:latin typeface="Calibri"/>
+              </a:rPr>
+              <a:t>Waar Aurora's aanbod de klant raakt</a:t>
+            </a:r>
+          </a:p>
+        </p:txBody>
+      </p:sp>
+      <p:sp>
+        <p:nvSpPr>
+          <p:cNvPr id="6" name="TextBox 5"/>
+          <p:cNvSpPr txBox="1"/>
+          <p:nvPr/>
+        </p:nvSpPr>
+        <p:spPr>
+          <a:xfrm>
+            <a:off x="411480" y="1234440"/>
+            <a:ext cx="2743200" cy="274320"/>
+          </a:xfrm>
+          <a:prstGeom prst="rect">
+            <a:avLst/>
+          </a:prstGeom>
+          <a:noFill/>
+        </p:spPr>
+        <p:txBody>
+          <a:bodyPr wrap="square" lIns="0" tIns="0" rIns="0" bIns="0">
+            <a:spAutoFit/>
+          </a:bodyPr>
+          <a:lstStyle/>
+          <a:p>
+            <a:pPr algn="l"/>
+            <a:r>
+              <a:rPr sz="1400" b="1">
+                <a:solidFill>
+                  <a:srgbClr val="F59E0B"/>
+                </a:solidFill>
+                <a:latin typeface="Calibri"/>
+              </a:rPr>
+              <a:t>VALUE MAP</a:t>
+            </a:r>
+          </a:p>
+        </p:txBody>
+      </p:sp>
+      <p:sp>
+        <p:nvSpPr>
+          <p:cNvPr id="7" name="TextBox 6"/>
+          <p:cNvSpPr txBox="1"/>
+          <p:nvPr/>
+        </p:nvSpPr>
+        <p:spPr>
+          <a:xfrm>
+            <a:off x="3246120" y="1252728"/>
+            <a:ext cx="2743200" cy="256032"/>
+          </a:xfrm>
+          <a:prstGeom prst="rect">
+            <a:avLst/>
+          </a:prstGeom>
+          <a:noFill/>
+        </p:spPr>
+        <p:txBody>
+          <a:bodyPr wrap="square" lIns="0" tIns="0" rIns="0" bIns="0">
+            <a:spAutoFit/>
+          </a:bodyPr>
+          <a:lstStyle/>
+          <a:p>
+            <a:pPr algn="r"/>
+            <a:r>
+              <a:rPr sz="1100" b="0">
+                <a:solidFill>
+                  <a:srgbClr val="6B6173"/>
+                </a:solidFill>
+                <a:latin typeface="Calibri"/>
+              </a:rPr>
+              <a:t>Aurora + techpartner</a:t>
+            </a:r>
+          </a:p>
+        </p:txBody>
+      </p:sp>
+      <p:sp>
+        <p:nvSpPr>
+          <p:cNvPr id="8" name="Rectangle 7"/>
           <p:cNvSpPr/>
           <p:nvPr/>
         </p:nvSpPr>
         <p:spPr>
           <a:xfrm>
-            <a:off x="548640" y="1417320"/>
-            <a:ext cx="5486400" cy="2468880"/>
-          </a:xfrm>
-          <a:prstGeom prst="roundRect">
-            <a:avLst>
-              <a:gd name="adj" fmla="val 8000"/>
-            </a:avLst>
+            <a:off x="411480" y="1600200"/>
+            <a:ext cx="5577840" cy="4937760"/>
+          </a:xfrm>
+          <a:prstGeom prst="rect">
+            <a:avLst/>
           </a:prstGeom>
           <a:solidFill>
             <a:srgbClr val="FFFFFF"/>
           </a:solidFill>
-          <a:ln w="19050">
+          <a:ln w="25400">
             <a:solidFill>
-              <a:srgbClr val="F59E0B"/>
+              <a:srgbClr val="2D2938"/>
             </a:solidFill>
           </a:ln>
         </p:spPr>
@@ -3558,28 +4206,811 @@
           <a:lstStyle/>
           <a:p>
             <a:pPr algn="ctr"/>
-          </a:p>
-        </p:txBody>
-      </p:sp>
-      <p:sp>
-        <p:nvSpPr>
-          <p:cNvPr id="7" name="Rectangle 6"/>
-          <p:cNvSpPr/>
+            <a:endParaRPr/>
+          </a:p>
+        </p:txBody>
+      </p:sp>
+      <p:cxnSp>
+        <p:nvCxnSpPr>
+          <p:cNvPr id="9" name="Connector 8"/>
+          <p:cNvCxnSpPr/>
           <p:nvPr/>
-        </p:nvSpPr>
-        <p:spPr>
-          <a:xfrm>
-            <a:off x="777240" y="1645920"/>
-            <a:ext cx="320040" cy="45720"/>
+        </p:nvCxnSpPr>
+        <p:spPr>
+          <a:xfrm flipH="1" flipV="1">
+            <a:off x="411480" y="1600200"/>
+            <a:ext cx="5577840" cy="0"/>
+          </a:xfrm>
+          <a:prstGeom prst="line">
+            <a:avLst/>
+          </a:prstGeom>
+          <a:ln w="19050">
+            <a:solidFill>
+              <a:srgbClr val="2D2938"/>
+            </a:solidFill>
+          </a:ln>
+        </p:spPr>
+        <p:style>
+          <a:lnRef idx="2">
+            <a:schemeClr val="accent1"/>
+          </a:lnRef>
+          <a:fillRef idx="0">
+            <a:schemeClr val="accent1"/>
+          </a:fillRef>
+          <a:effectRef idx="1">
+            <a:schemeClr val="accent1"/>
+          </a:effectRef>
+          <a:fontRef idx="minor">
+            <a:schemeClr val="tx1"/>
+          </a:fontRef>
+        </p:style>
+      </p:cxnSp>
+      <p:sp>
+        <p:nvSpPr>
+          <p:cNvPr id="11" name="TextBox 10"/>
+          <p:cNvSpPr txBox="1"/>
+          <p:nvPr/>
+        </p:nvSpPr>
+        <p:spPr>
+          <a:xfrm>
+            <a:off x="594360" y="3291840"/>
+            <a:ext cx="3200400" cy="320040"/>
           </a:xfrm>
           <a:prstGeom prst="rect">
             <a:avLst/>
           </a:prstGeom>
+          <a:noFill/>
+        </p:spPr>
+        <p:txBody>
+          <a:bodyPr wrap="none" lIns="0" tIns="0" rIns="0" bIns="0">
+            <a:spAutoFit/>
+          </a:bodyPr>
+          <a:lstStyle/>
+          <a:p>
+            <a:pPr algn="l"/>
+            <a:r>
+              <a:rPr sz="1400" b="1" spc="150">
+                <a:solidFill>
+                  <a:srgbClr val="2D2938"/>
+                </a:solidFill>
+                <a:latin typeface="Calibri"/>
+              </a:rPr>
+              <a:t>PRODUCTS &amp; SERVICES</a:t>
+            </a:r>
+          </a:p>
+        </p:txBody>
+      </p:sp>
+      <p:sp>
+        <p:nvSpPr>
+          <p:cNvPr id="12" name="TextBox 11"/>
+          <p:cNvSpPr txBox="1"/>
+          <p:nvPr/>
+        </p:nvSpPr>
+        <p:spPr>
+          <a:xfrm>
+            <a:off x="3246120" y="1828800"/>
+            <a:ext cx="2560320" cy="320040"/>
+          </a:xfrm>
+          <a:prstGeom prst="rect">
+            <a:avLst/>
+          </a:prstGeom>
+          <a:noFill/>
+        </p:spPr>
+        <p:txBody>
+          <a:bodyPr wrap="none" lIns="0" tIns="0" rIns="0" bIns="0">
+            <a:spAutoFit/>
+          </a:bodyPr>
+          <a:lstStyle/>
+          <a:p>
+            <a:pPr algn="r"/>
+            <a:r>
+              <a:rPr sz="1400" b="1" spc="150">
+                <a:solidFill>
+                  <a:srgbClr val="2D2938"/>
+                </a:solidFill>
+                <a:latin typeface="Calibri"/>
+              </a:rPr>
+              <a:t>GAIN CREATORS</a:t>
+            </a:r>
+          </a:p>
+        </p:txBody>
+      </p:sp>
+      <p:sp>
+        <p:nvSpPr>
+          <p:cNvPr id="13" name="TextBox 12"/>
+          <p:cNvSpPr txBox="1"/>
+          <p:nvPr/>
+        </p:nvSpPr>
+        <p:spPr>
+          <a:xfrm>
+            <a:off x="3246120" y="6035040"/>
+            <a:ext cx="2560320" cy="320040"/>
+          </a:xfrm>
+          <a:prstGeom prst="rect">
+            <a:avLst/>
+          </a:prstGeom>
+          <a:noFill/>
+        </p:spPr>
+        <p:txBody>
+          <a:bodyPr wrap="none" lIns="0" tIns="0" rIns="0" bIns="0">
+            <a:spAutoFit/>
+          </a:bodyPr>
+          <a:lstStyle/>
+          <a:p>
+            <a:pPr algn="r"/>
+            <a:r>
+              <a:rPr sz="1400" b="1" spc="150">
+                <a:solidFill>
+                  <a:srgbClr val="2D2938"/>
+                </a:solidFill>
+                <a:latin typeface="Calibri"/>
+              </a:rPr>
+              <a:t>PAIN RELIEVERS</a:t>
+            </a:r>
+          </a:p>
+        </p:txBody>
+      </p:sp>
+      <p:sp>
+        <p:nvSpPr>
+          <p:cNvPr id="14" name="TextBox 13"/>
+          <p:cNvSpPr txBox="1"/>
+          <p:nvPr/>
+        </p:nvSpPr>
+        <p:spPr>
+          <a:xfrm>
+            <a:off x="594360" y="3749040"/>
+            <a:ext cx="3657600" cy="1645920"/>
+          </a:xfrm>
+          <a:prstGeom prst="rect">
+            <a:avLst/>
+          </a:prstGeom>
+          <a:noFill/>
+        </p:spPr>
+        <p:txBody>
+          <a:bodyPr wrap="square" lIns="0" tIns="0" rIns="0" bIns="0">
+            <a:spAutoFit/>
+          </a:bodyPr>
+          <a:lstStyle/>
+          <a:p>
+            <a:pPr algn="l">
+              <a:spcAft>
+                <a:spcPts val="300"/>
+              </a:spcAft>
+            </a:pPr>
+            <a:r>
+              <a:rPr sz="1300" b="1" dirty="0">
+                <a:solidFill>
+                  <a:srgbClr val="F59E0B"/>
+                </a:solidFill>
+                <a:latin typeface="Calibri"/>
+              </a:rPr>
+              <a:t>•  </a:t>
+            </a:r>
+            <a:r>
+              <a:rPr sz="1300" dirty="0" err="1">
+                <a:solidFill>
+                  <a:srgbClr val="2D2938"/>
+                </a:solidFill>
+                <a:latin typeface="Calibri"/>
+              </a:rPr>
+              <a:t>Kennismodel</a:t>
+            </a:r>
+            <a:r>
+              <a:rPr sz="1300" dirty="0">
+                <a:solidFill>
+                  <a:srgbClr val="2D2938"/>
+                </a:solidFill>
+                <a:latin typeface="Calibri"/>
+              </a:rPr>
+              <a:t> </a:t>
+            </a:r>
+            <a:r>
+              <a:rPr sz="1300" dirty="0" err="1">
+                <a:solidFill>
+                  <a:srgbClr val="2D2938"/>
+                </a:solidFill>
+                <a:latin typeface="Calibri"/>
+              </a:rPr>
+              <a:t>voor</a:t>
+            </a:r>
+            <a:r>
+              <a:rPr sz="1300" dirty="0">
+                <a:solidFill>
+                  <a:srgbClr val="2D2938"/>
+                </a:solidFill>
+                <a:latin typeface="Calibri"/>
+              </a:rPr>
+              <a:t> </a:t>
+            </a:r>
+            <a:r>
+              <a:rPr sz="1300" dirty="0" err="1">
+                <a:solidFill>
+                  <a:srgbClr val="2D2938"/>
+                </a:solidFill>
+                <a:latin typeface="Calibri"/>
+              </a:rPr>
+              <a:t>authenticiteit</a:t>
+            </a:r>
+            <a:endParaRPr sz="1300" dirty="0">
+              <a:solidFill>
+                <a:srgbClr val="2D2938"/>
+              </a:solidFill>
+              <a:latin typeface="Calibri"/>
+            </a:endParaRPr>
+          </a:p>
+          <a:p>
+            <a:pPr algn="l">
+              <a:spcAft>
+                <a:spcPts val="300"/>
+              </a:spcAft>
+            </a:pPr>
+            <a:r>
+              <a:rPr sz="1300" b="1" dirty="0">
+                <a:solidFill>
+                  <a:srgbClr val="F59E0B"/>
+                </a:solidFill>
+                <a:latin typeface="Calibri"/>
+              </a:rPr>
+              <a:t>•  </a:t>
+            </a:r>
+            <a:r>
+              <a:rPr sz="1300" dirty="0" err="1">
+                <a:solidFill>
+                  <a:srgbClr val="2D2938"/>
+                </a:solidFill>
+                <a:latin typeface="Calibri"/>
+              </a:rPr>
+              <a:t>Verificatiestation</a:t>
+            </a:r>
+            <a:r>
+              <a:rPr sz="1300" dirty="0">
+                <a:solidFill>
+                  <a:srgbClr val="2D2938"/>
+                </a:solidFill>
+                <a:latin typeface="Calibri"/>
+              </a:rPr>
+              <a:t>: ID + PIN</a:t>
+            </a:r>
+          </a:p>
+          <a:p>
+            <a:pPr algn="l">
+              <a:spcAft>
+                <a:spcPts val="300"/>
+              </a:spcAft>
+            </a:pPr>
+            <a:r>
+              <a:rPr sz="1300" b="1" dirty="0">
+                <a:solidFill>
+                  <a:srgbClr val="F59E0B"/>
+                </a:solidFill>
+                <a:latin typeface="Calibri"/>
+              </a:rPr>
+              <a:t>•  </a:t>
+            </a:r>
+            <a:r>
+              <a:rPr sz="1300" dirty="0" err="1">
+                <a:solidFill>
+                  <a:srgbClr val="2D2938"/>
+                </a:solidFill>
+                <a:latin typeface="Calibri"/>
+              </a:rPr>
+              <a:t>Koppeling</a:t>
+            </a:r>
+            <a:r>
+              <a:rPr sz="1300" dirty="0">
+                <a:solidFill>
+                  <a:srgbClr val="2D2938"/>
+                </a:solidFill>
+                <a:latin typeface="Calibri"/>
+              </a:rPr>
+              <a:t> </a:t>
+            </a:r>
+            <a:r>
+              <a:rPr sz="1300" dirty="0" err="1">
+                <a:solidFill>
+                  <a:srgbClr val="2D2938"/>
+                </a:solidFill>
+                <a:latin typeface="Calibri"/>
+              </a:rPr>
+              <a:t>handtekening</a:t>
+            </a:r>
+            <a:r>
+              <a:rPr sz="1300" dirty="0">
+                <a:solidFill>
+                  <a:srgbClr val="2D2938"/>
+                </a:solidFill>
+                <a:latin typeface="Calibri"/>
+              </a:rPr>
+              <a:t> ↔ code</a:t>
+            </a:r>
+          </a:p>
+          <a:p>
+            <a:pPr algn="l">
+              <a:spcAft>
+                <a:spcPts val="300"/>
+              </a:spcAft>
+            </a:pPr>
+            <a:r>
+              <a:rPr sz="1300" b="1" dirty="0">
+                <a:solidFill>
+                  <a:srgbClr val="F59E0B"/>
+                </a:solidFill>
+                <a:latin typeface="Calibri"/>
+              </a:rPr>
+              <a:t>•  </a:t>
+            </a:r>
+            <a:r>
+              <a:rPr sz="1300" dirty="0" err="1">
+                <a:solidFill>
+                  <a:srgbClr val="2D2938"/>
+                </a:solidFill>
+                <a:latin typeface="Calibri"/>
+              </a:rPr>
+              <a:t>Implementatie-ondersteuning</a:t>
+            </a:r>
+            <a:endParaRPr sz="1300" dirty="0">
+              <a:solidFill>
+                <a:srgbClr val="2D2938"/>
+              </a:solidFill>
+              <a:latin typeface="Calibri"/>
+            </a:endParaRPr>
+          </a:p>
+        </p:txBody>
+      </p:sp>
+      <p:sp>
+        <p:nvSpPr>
+          <p:cNvPr id="15" name="TextBox 14"/>
+          <p:cNvSpPr txBox="1"/>
+          <p:nvPr/>
+        </p:nvSpPr>
+        <p:spPr>
+          <a:xfrm>
+            <a:off x="3154680" y="2194560"/>
+            <a:ext cx="2651760" cy="1280160"/>
+          </a:xfrm>
+          <a:prstGeom prst="rect">
+            <a:avLst/>
+          </a:prstGeom>
+          <a:noFill/>
+        </p:spPr>
+        <p:txBody>
+          <a:bodyPr wrap="square" lIns="0" tIns="0" rIns="0" bIns="0">
+            <a:spAutoFit/>
+          </a:bodyPr>
+          <a:lstStyle/>
+          <a:p>
+            <a:pPr algn="r">
+              <a:spcAft>
+                <a:spcPts val="300"/>
+              </a:spcAft>
+            </a:pPr>
+            <a:r>
+              <a:rPr sz="1100" b="1">
+                <a:solidFill>
+                  <a:srgbClr val="F59E0B"/>
+                </a:solidFill>
+                <a:latin typeface="Calibri"/>
+              </a:rPr>
+              <a:t>•  </a:t>
+            </a:r>
+            <a:r>
+              <a:rPr sz="1100">
+                <a:solidFill>
+                  <a:srgbClr val="2D2938"/>
+                </a:solidFill>
+                <a:latin typeface="Calibri"/>
+              </a:rPr>
+              <a:t>Juridisch waterdichte audittrail</a:t>
+            </a:r>
+          </a:p>
+          <a:p>
+            <a:pPr algn="r">
+              <a:spcAft>
+                <a:spcPts val="300"/>
+              </a:spcAft>
+            </a:pPr>
+            <a:r>
+              <a:rPr sz="1100" b="1">
+                <a:solidFill>
+                  <a:srgbClr val="F59E0B"/>
+                </a:solidFill>
+                <a:latin typeface="Calibri"/>
+              </a:rPr>
+              <a:t>•  </a:t>
+            </a:r>
+            <a:r>
+              <a:rPr sz="1100">
+                <a:solidFill>
+                  <a:srgbClr val="2D2938"/>
+                </a:solidFill>
+                <a:latin typeface="Calibri"/>
+              </a:rPr>
+              <a:t>Schaalbaar over transacties</a:t>
+            </a:r>
+          </a:p>
+          <a:p>
+            <a:pPr algn="r">
+              <a:spcAft>
+                <a:spcPts val="300"/>
+              </a:spcAft>
+            </a:pPr>
+            <a:r>
+              <a:rPr sz="1100" b="1">
+                <a:solidFill>
+                  <a:srgbClr val="F59E0B"/>
+                </a:solidFill>
+                <a:latin typeface="Calibri"/>
+              </a:rPr>
+              <a:t>•  </a:t>
+            </a:r>
+            <a:r>
+              <a:rPr sz="1100">
+                <a:solidFill>
+                  <a:srgbClr val="2D2938"/>
+                </a:solidFill>
+                <a:latin typeface="Calibri"/>
+              </a:rPr>
+              <a:t>Compliance-klaar</a:t>
+            </a:r>
+          </a:p>
+          <a:p>
+            <a:pPr algn="r">
+              <a:spcAft>
+                <a:spcPts val="300"/>
+              </a:spcAft>
+            </a:pPr>
+            <a:r>
+              <a:rPr sz="1100" b="1">
+                <a:solidFill>
+                  <a:srgbClr val="F59E0B"/>
+                </a:solidFill>
+                <a:latin typeface="Calibri"/>
+              </a:rPr>
+              <a:t>•  </a:t>
+            </a:r>
+            <a:r>
+              <a:rPr sz="1100">
+                <a:solidFill>
+                  <a:srgbClr val="2D2938"/>
+                </a:solidFill>
+                <a:latin typeface="Calibri"/>
+              </a:rPr>
+              <a:t>Domeinkennis geeft gezag</a:t>
+            </a:r>
+          </a:p>
+        </p:txBody>
+      </p:sp>
+      <p:sp>
+        <p:nvSpPr>
+          <p:cNvPr id="16" name="TextBox 15"/>
+          <p:cNvSpPr txBox="1"/>
+          <p:nvPr/>
+        </p:nvSpPr>
+        <p:spPr>
+          <a:xfrm>
+            <a:off x="3154680" y="5143500"/>
+            <a:ext cx="2651760" cy="1280160"/>
+          </a:xfrm>
+          <a:prstGeom prst="rect">
+            <a:avLst/>
+          </a:prstGeom>
+          <a:noFill/>
+        </p:spPr>
+        <p:txBody>
+          <a:bodyPr wrap="square" lIns="0" tIns="0" rIns="0" bIns="0">
+            <a:spAutoFit/>
+          </a:bodyPr>
+          <a:lstStyle/>
+          <a:p>
+            <a:pPr algn="r">
+              <a:spcAft>
+                <a:spcPts val="300"/>
+              </a:spcAft>
+            </a:pPr>
+            <a:r>
+              <a:rPr sz="1100" b="1" dirty="0">
+                <a:solidFill>
+                  <a:srgbClr val="F59E0B"/>
+                </a:solidFill>
+                <a:latin typeface="Calibri"/>
+              </a:rPr>
+              <a:t>•  </a:t>
+            </a:r>
+            <a:r>
+              <a:rPr sz="1100" dirty="0" err="1">
+                <a:solidFill>
+                  <a:srgbClr val="2D2938"/>
+                </a:solidFill>
+                <a:latin typeface="Calibri"/>
+              </a:rPr>
+              <a:t>Objectieve</a:t>
+            </a:r>
+            <a:r>
+              <a:rPr sz="1100" dirty="0">
+                <a:solidFill>
+                  <a:srgbClr val="2D2938"/>
+                </a:solidFill>
+                <a:latin typeface="Calibri"/>
+              </a:rPr>
+              <a:t> ID-check</a:t>
+            </a:r>
+          </a:p>
+          <a:p>
+            <a:pPr algn="r">
+              <a:spcAft>
+                <a:spcPts val="300"/>
+              </a:spcAft>
+            </a:pPr>
+            <a:r>
+              <a:rPr sz="1100" b="1" dirty="0">
+                <a:solidFill>
+                  <a:srgbClr val="F59E0B"/>
+                </a:solidFill>
+                <a:latin typeface="Calibri"/>
+              </a:rPr>
+              <a:t>•  </a:t>
+            </a:r>
+            <a:r>
+              <a:rPr sz="1100" dirty="0" err="1">
+                <a:solidFill>
+                  <a:srgbClr val="2D2938"/>
+                </a:solidFill>
+                <a:latin typeface="Calibri"/>
+              </a:rPr>
+              <a:t>Gescande</a:t>
+            </a:r>
+            <a:r>
+              <a:rPr sz="1100" dirty="0">
+                <a:solidFill>
+                  <a:srgbClr val="2D2938"/>
+                </a:solidFill>
+                <a:latin typeface="Calibri"/>
+              </a:rPr>
+              <a:t> </a:t>
+            </a:r>
+            <a:r>
+              <a:rPr sz="1100" dirty="0" err="1">
+                <a:solidFill>
+                  <a:srgbClr val="2D2938"/>
+                </a:solidFill>
+                <a:latin typeface="Calibri"/>
+              </a:rPr>
+              <a:t>handtekening</a:t>
+            </a:r>
+            <a:r>
+              <a:rPr sz="1100" dirty="0">
+                <a:solidFill>
+                  <a:srgbClr val="2D2938"/>
+                </a:solidFill>
+                <a:latin typeface="Calibri"/>
+              </a:rPr>
+              <a:t> </a:t>
+            </a:r>
+            <a:r>
+              <a:rPr sz="1100" dirty="0" err="1">
+                <a:solidFill>
+                  <a:srgbClr val="2D2938"/>
+                </a:solidFill>
+                <a:latin typeface="Calibri"/>
+              </a:rPr>
+              <a:t>rechtsgeldig</a:t>
+            </a:r>
+            <a:endParaRPr sz="1100" dirty="0">
+              <a:solidFill>
+                <a:srgbClr val="2D2938"/>
+              </a:solidFill>
+              <a:latin typeface="Calibri"/>
+            </a:endParaRPr>
+          </a:p>
+          <a:p>
+            <a:pPr algn="r">
+              <a:spcAft>
+                <a:spcPts val="300"/>
+              </a:spcAft>
+            </a:pPr>
+            <a:r>
+              <a:rPr sz="1100" b="1" dirty="0">
+                <a:solidFill>
+                  <a:srgbClr val="F59E0B"/>
+                </a:solidFill>
+                <a:latin typeface="Calibri"/>
+              </a:rPr>
+              <a:t>•  </a:t>
+            </a:r>
+            <a:r>
+              <a:rPr sz="1100" dirty="0" err="1">
+                <a:solidFill>
+                  <a:srgbClr val="2D2938"/>
+                </a:solidFill>
+                <a:latin typeface="Calibri"/>
+              </a:rPr>
+              <a:t>Fraudesignalen</a:t>
+            </a:r>
+            <a:r>
+              <a:rPr sz="1100" dirty="0">
+                <a:solidFill>
+                  <a:srgbClr val="2D2938"/>
+                </a:solidFill>
+                <a:latin typeface="Calibri"/>
+              </a:rPr>
+              <a:t> direct </a:t>
+            </a:r>
+            <a:r>
+              <a:rPr sz="1100" dirty="0" err="1">
+                <a:solidFill>
+                  <a:srgbClr val="2D2938"/>
+                </a:solidFill>
+                <a:latin typeface="Calibri"/>
+              </a:rPr>
+              <a:t>zichtbaar</a:t>
+            </a:r>
+            <a:endParaRPr sz="1100" dirty="0">
+              <a:solidFill>
+                <a:srgbClr val="2D2938"/>
+              </a:solidFill>
+              <a:latin typeface="Calibri"/>
+            </a:endParaRPr>
+          </a:p>
+          <a:p>
+            <a:pPr algn="r">
+              <a:spcAft>
+                <a:spcPts val="300"/>
+              </a:spcAft>
+            </a:pPr>
+            <a:r>
+              <a:rPr sz="1100" b="1" dirty="0">
+                <a:solidFill>
+                  <a:srgbClr val="F59E0B"/>
+                </a:solidFill>
+                <a:latin typeface="Calibri"/>
+              </a:rPr>
+              <a:t>•  </a:t>
+            </a:r>
+            <a:r>
+              <a:rPr sz="1100" dirty="0" err="1">
+                <a:solidFill>
+                  <a:srgbClr val="2D2938"/>
+                </a:solidFill>
+                <a:latin typeface="Calibri"/>
+              </a:rPr>
+              <a:t>Digitaal</a:t>
+            </a:r>
+            <a:r>
+              <a:rPr sz="1100" dirty="0">
+                <a:solidFill>
+                  <a:srgbClr val="2D2938"/>
+                </a:solidFill>
+                <a:latin typeface="Calibri"/>
+              </a:rPr>
+              <a:t> </a:t>
+            </a:r>
+            <a:r>
+              <a:rPr sz="1100" dirty="0" err="1">
+                <a:solidFill>
+                  <a:srgbClr val="2D2938"/>
+                </a:solidFill>
+                <a:latin typeface="Calibri"/>
+              </a:rPr>
+              <a:t>doorzoekbaar</a:t>
+            </a:r>
+            <a:r>
+              <a:rPr sz="1100" dirty="0">
+                <a:solidFill>
+                  <a:srgbClr val="2D2938"/>
+                </a:solidFill>
+                <a:latin typeface="Calibri"/>
+              </a:rPr>
+              <a:t> </a:t>
+            </a:r>
+            <a:r>
+              <a:rPr sz="1100" dirty="0" err="1">
+                <a:solidFill>
+                  <a:srgbClr val="2D2938"/>
+                </a:solidFill>
+                <a:latin typeface="Calibri"/>
+              </a:rPr>
+              <a:t>archief</a:t>
+            </a:r>
+            <a:endParaRPr sz="1100" dirty="0">
+              <a:solidFill>
+                <a:srgbClr val="2D2938"/>
+              </a:solidFill>
+              <a:latin typeface="Calibri"/>
+            </a:endParaRPr>
+          </a:p>
+        </p:txBody>
+      </p:sp>
+      <p:sp>
+        <p:nvSpPr>
+          <p:cNvPr id="17" name="TextBox 16"/>
+          <p:cNvSpPr txBox="1"/>
+          <p:nvPr/>
+        </p:nvSpPr>
+        <p:spPr>
+          <a:xfrm>
+            <a:off x="6400800" y="1234440"/>
+            <a:ext cx="3200400" cy="274320"/>
+          </a:xfrm>
+          <a:prstGeom prst="rect">
+            <a:avLst/>
+          </a:prstGeom>
+          <a:noFill/>
+        </p:spPr>
+        <p:txBody>
+          <a:bodyPr wrap="square" lIns="0" tIns="0" rIns="0" bIns="0">
+            <a:spAutoFit/>
+          </a:bodyPr>
+          <a:lstStyle/>
+          <a:p>
+            <a:pPr algn="l"/>
+            <a:r>
+              <a:rPr sz="1400" b="1">
+                <a:solidFill>
+                  <a:srgbClr val="2D2938"/>
+                </a:solidFill>
+                <a:latin typeface="Calibri"/>
+              </a:rPr>
+              <a:t>CUSTOMER PROFILE</a:t>
+            </a:r>
+          </a:p>
+        </p:txBody>
+      </p:sp>
+      <p:sp>
+        <p:nvSpPr>
+          <p:cNvPr id="18" name="TextBox 17"/>
+          <p:cNvSpPr txBox="1"/>
+          <p:nvPr/>
+        </p:nvSpPr>
+        <p:spPr>
+          <a:xfrm>
+            <a:off x="8595360" y="1252728"/>
+            <a:ext cx="2743200" cy="256032"/>
+          </a:xfrm>
+          <a:prstGeom prst="rect">
+            <a:avLst/>
+          </a:prstGeom>
+          <a:noFill/>
+        </p:spPr>
+        <p:txBody>
+          <a:bodyPr wrap="square" lIns="0" tIns="0" rIns="0" bIns="0">
+            <a:spAutoFit/>
+          </a:bodyPr>
+          <a:lstStyle/>
+          <a:p>
+            <a:pPr algn="r"/>
+            <a:r>
+              <a:rPr sz="1100" b="0">
+                <a:solidFill>
+                  <a:srgbClr val="6B6173"/>
+                </a:solidFill>
+                <a:latin typeface="Calibri"/>
+              </a:rPr>
+              <a:t>Notaris, bank, gemeente</a:t>
+            </a:r>
+          </a:p>
+        </p:txBody>
+      </p:sp>
+      <p:sp>
+        <p:nvSpPr>
+          <p:cNvPr id="19" name="Oval 18"/>
+          <p:cNvSpPr/>
+          <p:nvPr/>
+        </p:nvSpPr>
+        <p:spPr>
+          <a:xfrm>
+            <a:off x="6400800" y="1600200"/>
+            <a:ext cx="4937760" cy="4937760"/>
+          </a:xfrm>
+          <a:prstGeom prst="ellipse">
+            <a:avLst/>
+          </a:prstGeom>
           <a:solidFill>
-            <a:srgbClr val="F59E0B"/>
+            <a:srgbClr val="FFFFFF"/>
           </a:solidFill>
-          <a:ln>
-            <a:noFill/>
+          <a:ln w="25400">
+            <a:solidFill>
+              <a:srgbClr val="2D2938"/>
+            </a:solidFill>
           </a:ln>
         </p:spPr>
         <p:style>
@@ -3601,19 +5032,125 @@
           <a:lstStyle/>
           <a:p>
             <a:pPr algn="ctr"/>
-          </a:p>
-        </p:txBody>
-      </p:sp>
-      <p:sp>
-        <p:nvSpPr>
-          <p:cNvPr id="8" name="TextBox 7"/>
+            <a:endParaRPr/>
+          </a:p>
+        </p:txBody>
+      </p:sp>
+      <p:cxnSp>
+        <p:nvCxnSpPr>
+          <p:cNvPr id="20" name="Connector 19"/>
+          <p:cNvCxnSpPr/>
+          <p:nvPr/>
+        </p:nvCxnSpPr>
+        <p:spPr>
+          <a:xfrm flipV="1">
+            <a:off x="0" y="1600200"/>
+            <a:ext cx="0" cy="0"/>
+          </a:xfrm>
+          <a:prstGeom prst="line">
+            <a:avLst/>
+          </a:prstGeom>
+          <a:ln w="19050">
+            <a:solidFill>
+              <a:srgbClr val="2D2938"/>
+            </a:solidFill>
+          </a:ln>
+        </p:spPr>
+        <p:style>
+          <a:lnRef idx="2">
+            <a:schemeClr val="accent1"/>
+          </a:lnRef>
+          <a:fillRef idx="0">
+            <a:schemeClr val="accent1"/>
+          </a:fillRef>
+          <a:effectRef idx="1">
+            <a:schemeClr val="accent1"/>
+          </a:effectRef>
+          <a:fontRef idx="minor">
+            <a:schemeClr val="tx1"/>
+          </a:fontRef>
+        </p:style>
+      </p:cxnSp>
+      <p:cxnSp>
+        <p:nvCxnSpPr>
+          <p:cNvPr id="21" name="Connector 20"/>
+          <p:cNvCxnSpPr/>
+          <p:nvPr/>
+        </p:nvCxnSpPr>
+        <p:spPr>
+          <a:xfrm flipH="1">
+            <a:off x="6400800" y="0"/>
+            <a:ext cx="0" cy="0"/>
+          </a:xfrm>
+          <a:prstGeom prst="line">
+            <a:avLst/>
+          </a:prstGeom>
+          <a:ln w="19050">
+            <a:solidFill>
+              <a:srgbClr val="2D2938"/>
+            </a:solidFill>
+          </a:ln>
+        </p:spPr>
+        <p:style>
+          <a:lnRef idx="2">
+            <a:schemeClr val="accent1"/>
+          </a:lnRef>
+          <a:fillRef idx="0">
+            <a:schemeClr val="accent1"/>
+          </a:fillRef>
+          <a:effectRef idx="1">
+            <a:schemeClr val="accent1"/>
+          </a:effectRef>
+          <a:fontRef idx="minor">
+            <a:schemeClr val="tx1"/>
+          </a:fontRef>
+        </p:style>
+      </p:cxnSp>
+      <p:cxnSp>
+        <p:nvCxnSpPr>
+          <p:cNvPr id="22" name="Connector 21"/>
+          <p:cNvCxnSpPr/>
+          <p:nvPr/>
+        </p:nvCxnSpPr>
+        <p:spPr>
+          <a:xfrm>
+            <a:off x="0" y="0"/>
+            <a:ext cx="0" cy="0"/>
+          </a:xfrm>
+          <a:prstGeom prst="line">
+            <a:avLst/>
+          </a:prstGeom>
+          <a:ln w="19050">
+            <a:solidFill>
+              <a:srgbClr val="2D2938"/>
+            </a:solidFill>
+          </a:ln>
+        </p:spPr>
+        <p:style>
+          <a:lnRef idx="2">
+            <a:schemeClr val="accent1"/>
+          </a:lnRef>
+          <a:fillRef idx="0">
+            <a:schemeClr val="accent1"/>
+          </a:fillRef>
+          <a:effectRef idx="1">
+            <a:schemeClr val="accent1"/>
+          </a:effectRef>
+          <a:fontRef idx="minor">
+            <a:schemeClr val="tx1"/>
+          </a:fontRef>
+        </p:style>
+      </p:cxnSp>
+      <p:sp>
+        <p:nvSpPr>
+          <p:cNvPr id="23" name="TextBox 22"/>
           <p:cNvSpPr txBox="1"/>
           <p:nvPr/>
         </p:nvSpPr>
         <p:spPr>
           <a:xfrm>
-            <a:off x="777240" y="1737360"/>
-            <a:ext cx="5029200" cy="320040"/>
+            <a:off x="7223760" y="2483857"/>
+            <a:ext cx="1645920" cy="320040"/>
           </a:xfrm>
           <a:prstGeom prst="rect">
             <a:avLst/>
@@ -3621,34 +5158,34 @@
           <a:noFill/>
         </p:spPr>
         <p:txBody>
-          <a:bodyPr wrap="square" lIns="0" rIns="0" tIns="0" bIns="0">
+          <a:bodyPr wrap="none" lIns="0" tIns="0" rIns="0" bIns="0">
             <a:spAutoFit/>
           </a:bodyPr>
           <a:lstStyle/>
           <a:p>
             <a:pPr algn="l"/>
             <a:r>
-              <a:rPr sz="1300" b="1">
-                <a:solidFill>
-                  <a:srgbClr val="2D2938"/>
-                </a:solidFill>
-                <a:latin typeface="Calibri"/>
-              </a:rPr>
-              <a:t>Strategische fit</a:t>
-            </a:r>
-          </a:p>
-        </p:txBody>
-      </p:sp>
-      <p:sp>
-        <p:nvSpPr>
-          <p:cNvPr id="9" name="TextBox 8"/>
+              <a:rPr sz="1400" b="1" spc="150" dirty="0">
+                <a:solidFill>
+                  <a:srgbClr val="2D2938"/>
+                </a:solidFill>
+                <a:latin typeface="Calibri"/>
+              </a:rPr>
+              <a:t>GAINS</a:t>
+            </a:r>
+          </a:p>
+        </p:txBody>
+      </p:sp>
+      <p:sp>
+        <p:nvSpPr>
+          <p:cNvPr id="24" name="TextBox 23"/>
           <p:cNvSpPr txBox="1"/>
           <p:nvPr/>
         </p:nvSpPr>
         <p:spPr>
           <a:xfrm>
-            <a:off x="777240" y="2148840"/>
-            <a:ext cx="5029200" cy="1645920"/>
+            <a:off x="6617208" y="4226472"/>
+            <a:ext cx="1645920" cy="320040"/>
           </a:xfrm>
           <a:prstGeom prst="rect">
             <a:avLst/>
@@ -3656,160 +5193,34 @@
           <a:noFill/>
         </p:spPr>
         <p:txBody>
-          <a:bodyPr wrap="square" lIns="0" rIns="0" tIns="0" bIns="0">
+          <a:bodyPr wrap="none" lIns="0" tIns="0" rIns="0" bIns="0">
             <a:spAutoFit/>
           </a:bodyPr>
           <a:lstStyle/>
           <a:p>
-            <a:pPr>
-              <a:spcAft>
-                <a:spcPts val="400"/>
-              </a:spcAft>
-            </a:pPr>
-            <a:r>
-              <a:rPr sz="1050">
-                <a:solidFill>
-                  <a:srgbClr val="6B6173"/>
-                </a:solidFill>
-                <a:latin typeface="Calibri"/>
-              </a:rPr>
-              <a:t>•  125+ jaar autoriteit rond ondertekenen</a:t>
-            </a:r>
-          </a:p>
-          <a:p>
-            <a:pPr>
-              <a:spcAft>
-                <a:spcPts val="400"/>
-              </a:spcAft>
-            </a:pPr>
-            <a:r>
-              <a:rPr sz="1050">
-                <a:solidFill>
-                  <a:srgbClr val="6B6173"/>
-                </a:solidFill>
-                <a:latin typeface="Calibri"/>
-              </a:rPr>
-              <a:t>•  Betekeniswereld (vertrouwen, gezag) blijft</a:t>
-            </a:r>
-          </a:p>
-          <a:p>
-            <a:pPr>
-              <a:spcAft>
-                <a:spcPts val="400"/>
-              </a:spcAft>
-            </a:pPr>
-            <a:r>
-              <a:rPr sz="1050">
-                <a:solidFill>
-                  <a:srgbClr val="6B6173"/>
-                </a:solidFill>
-                <a:latin typeface="Calibri"/>
-              </a:rPr>
-              <a:t>•  Verschuiving: van tool naar proces</a:t>
-            </a:r>
-          </a:p>
-        </p:txBody>
-      </p:sp>
-      <p:sp>
-        <p:nvSpPr>
-          <p:cNvPr id="10" name="Rounded Rectangle 9"/>
-          <p:cNvSpPr/>
-          <p:nvPr/>
-        </p:nvSpPr>
-        <p:spPr>
-          <a:xfrm>
-            <a:off x="6172200" y="1417320"/>
-            <a:ext cx="5486400" cy="2468880"/>
-          </a:xfrm>
-          <a:prstGeom prst="roundRect">
-            <a:avLst>
-              <a:gd name="adj" fmla="val 8000"/>
-            </a:avLst>
-          </a:prstGeom>
-          <a:solidFill>
-            <a:srgbClr val="FFFFFF"/>
-          </a:solidFill>
-          <a:ln w="19050">
-            <a:solidFill>
-              <a:srgbClr val="F59E0B"/>
-            </a:solidFill>
-          </a:ln>
-        </p:spPr>
-        <p:style>
-          <a:lnRef idx="1">
-            <a:schemeClr val="accent1"/>
-          </a:lnRef>
-          <a:fillRef idx="3">
-            <a:schemeClr val="accent1"/>
-          </a:fillRef>
-          <a:effectRef idx="2">
-            <a:schemeClr val="accent1"/>
-          </a:effectRef>
-          <a:fontRef idx="minor">
-            <a:schemeClr val="lt1"/>
-          </a:fontRef>
-        </p:style>
-        <p:txBody>
-          <a:bodyPr rtlCol="0" anchor="ctr"/>
-          <a:lstStyle/>
-          <a:p>
-            <a:pPr algn="ctr"/>
-          </a:p>
-        </p:txBody>
-      </p:sp>
-      <p:sp>
-        <p:nvSpPr>
-          <p:cNvPr id="11" name="Rectangle 10"/>
-          <p:cNvSpPr/>
-          <p:nvPr/>
-        </p:nvSpPr>
-        <p:spPr>
-          <a:xfrm>
-            <a:off x="6400800" y="1645920"/>
-            <a:ext cx="320040" cy="45720"/>
-          </a:xfrm>
-          <a:prstGeom prst="rect">
-            <a:avLst/>
-          </a:prstGeom>
-          <a:solidFill>
-            <a:srgbClr val="F59E0B"/>
-          </a:solidFill>
-          <a:ln>
-            <a:noFill/>
-          </a:ln>
-        </p:spPr>
-        <p:style>
-          <a:lnRef idx="1">
-            <a:schemeClr val="accent1"/>
-          </a:lnRef>
-          <a:fillRef idx="3">
-            <a:schemeClr val="accent1"/>
-          </a:fillRef>
-          <a:effectRef idx="2">
-            <a:schemeClr val="accent1"/>
-          </a:effectRef>
-          <a:fontRef idx="minor">
-            <a:schemeClr val="lt1"/>
-          </a:fontRef>
-        </p:style>
-        <p:txBody>
-          <a:bodyPr rtlCol="0" anchor="ctr"/>
-          <a:lstStyle/>
-          <a:p>
-            <a:pPr algn="ctr"/>
-          </a:p>
-        </p:txBody>
-      </p:sp>
-      <p:sp>
-        <p:nvSpPr>
-          <p:cNvPr id="12" name="TextBox 11"/>
+            <a:pPr algn="l"/>
+            <a:r>
+              <a:rPr sz="1400" b="1" spc="150" dirty="0">
+                <a:solidFill>
+                  <a:srgbClr val="2D2938"/>
+                </a:solidFill>
+                <a:latin typeface="Calibri"/>
+              </a:rPr>
+              <a:t>PAINS</a:t>
+            </a:r>
+          </a:p>
+        </p:txBody>
+      </p:sp>
+      <p:sp>
+        <p:nvSpPr>
+          <p:cNvPr id="25" name="TextBox 24"/>
           <p:cNvSpPr txBox="1"/>
           <p:nvPr/>
         </p:nvSpPr>
         <p:spPr>
           <a:xfrm>
-            <a:off x="6400800" y="1737360"/>
-            <a:ext cx="5029200" cy="320040"/>
+            <a:off x="9144000" y="3406929"/>
+            <a:ext cx="2011680" cy="320040"/>
           </a:xfrm>
           <a:prstGeom prst="rect">
             <a:avLst/>
@@ -3817,34 +5228,34 @@
           <a:noFill/>
         </p:spPr>
         <p:txBody>
-          <a:bodyPr wrap="square" lIns="0" rIns="0" tIns="0" bIns="0">
+          <a:bodyPr wrap="none" lIns="0" tIns="0" rIns="0" bIns="0">
             <a:spAutoFit/>
           </a:bodyPr>
           <a:lstStyle/>
           <a:p>
-            <a:pPr algn="l"/>
-            <a:r>
-              <a:rPr sz="1300" b="1">
-                <a:solidFill>
-                  <a:srgbClr val="2D2938"/>
-                </a:solidFill>
-                <a:latin typeface="Calibri"/>
-              </a:rPr>
-              <a:t>Kerncompetenties</a:t>
-            </a:r>
-          </a:p>
-        </p:txBody>
-      </p:sp>
-      <p:sp>
-        <p:nvSpPr>
-          <p:cNvPr id="13" name="TextBox 12"/>
+            <a:pPr algn="r"/>
+            <a:r>
+              <a:rPr sz="1400" b="1" spc="150" dirty="0">
+                <a:solidFill>
+                  <a:srgbClr val="2D2938"/>
+                </a:solidFill>
+                <a:latin typeface="Calibri"/>
+              </a:rPr>
+              <a:t>JOB-TO-BE-DONE</a:t>
+            </a:r>
+          </a:p>
+        </p:txBody>
+      </p:sp>
+      <p:sp>
+        <p:nvSpPr>
+          <p:cNvPr id="26" name="TextBox 25"/>
           <p:cNvSpPr txBox="1"/>
           <p:nvPr/>
         </p:nvSpPr>
         <p:spPr>
           <a:xfrm>
-            <a:off x="6400800" y="2148840"/>
-            <a:ext cx="5029200" cy="1645920"/>
+            <a:off x="7110242" y="2978635"/>
+            <a:ext cx="2011680" cy="1005840"/>
           </a:xfrm>
           <a:prstGeom prst="rect">
             <a:avLst/>
@@ -3852,176 +5263,200 @@
           <a:noFill/>
         </p:spPr>
         <p:txBody>
-          <a:bodyPr wrap="square" lIns="0" rIns="0" tIns="0" bIns="0">
+          <a:bodyPr wrap="square" lIns="0" tIns="0" rIns="0" bIns="0">
             <a:spAutoFit/>
           </a:bodyPr>
           <a:lstStyle/>
           <a:p>
-            <a:pPr>
+            <a:pPr algn="l">
               <a:spcAft>
-                <a:spcPts val="400"/>
+                <a:spcPts val="300"/>
               </a:spcAft>
             </a:pPr>
             <a:r>
-              <a:rPr sz="1050">
-                <a:solidFill>
-                  <a:srgbClr val="6B6173"/>
-                </a:solidFill>
-                <a:latin typeface="Calibri"/>
-              </a:rPr>
-              <a:t>•  Domeinkennis: hoe mensen tekenen</a:t>
-            </a:r>
-          </a:p>
-          <a:p>
-            <a:pPr>
+              <a:rPr sz="1100" b="1" dirty="0">
+                <a:solidFill>
+                  <a:srgbClr val="2D2938"/>
+                </a:solidFill>
+                <a:latin typeface="Calibri"/>
+              </a:rPr>
+              <a:t>•  </a:t>
+            </a:r>
+            <a:r>
+              <a:rPr sz="1100" dirty="0" err="1">
+                <a:solidFill>
+                  <a:srgbClr val="2D2938"/>
+                </a:solidFill>
+                <a:latin typeface="Calibri"/>
+              </a:rPr>
+              <a:t>Juridische</a:t>
+            </a:r>
+            <a:r>
+              <a:rPr sz="1100" dirty="0">
+                <a:solidFill>
+                  <a:srgbClr val="2D2938"/>
+                </a:solidFill>
+                <a:latin typeface="Calibri"/>
+              </a:rPr>
+              <a:t> </a:t>
+            </a:r>
+            <a:r>
+              <a:rPr sz="1100" dirty="0" err="1">
+                <a:solidFill>
+                  <a:srgbClr val="2D2938"/>
+                </a:solidFill>
+                <a:latin typeface="Calibri"/>
+              </a:rPr>
+              <a:t>zekerheid</a:t>
+            </a:r>
+            <a:endParaRPr sz="1100" dirty="0">
+              <a:solidFill>
+                <a:srgbClr val="2D2938"/>
+              </a:solidFill>
+              <a:latin typeface="Calibri"/>
+            </a:endParaRPr>
+          </a:p>
+          <a:p>
+            <a:pPr algn="l">
               <a:spcAft>
-                <a:spcPts val="400"/>
+                <a:spcPts val="300"/>
               </a:spcAft>
             </a:pPr>
             <a:r>
-              <a:rPr sz="1050">
-                <a:solidFill>
-                  <a:srgbClr val="6B6173"/>
-                </a:solidFill>
-                <a:latin typeface="Calibri"/>
-              </a:rPr>
-              <a:t>•  Merkautoriteit bij notaris en bank</a:t>
-            </a:r>
-          </a:p>
-          <a:p>
-            <a:pPr>
+              <a:rPr sz="1100" b="1" dirty="0">
+                <a:solidFill>
+                  <a:srgbClr val="2D2938"/>
+                </a:solidFill>
+                <a:latin typeface="Calibri"/>
+              </a:rPr>
+              <a:t>•  </a:t>
+            </a:r>
+            <a:r>
+              <a:rPr sz="1100" dirty="0">
+                <a:solidFill>
+                  <a:srgbClr val="2D2938"/>
+                </a:solidFill>
+                <a:latin typeface="Calibri"/>
+              </a:rPr>
+              <a:t>Sneller </a:t>
+            </a:r>
+            <a:r>
+              <a:rPr sz="1100" dirty="0" err="1">
+                <a:solidFill>
+                  <a:srgbClr val="2D2938"/>
+                </a:solidFill>
+                <a:latin typeface="Calibri"/>
+              </a:rPr>
+              <a:t>proces</a:t>
+            </a:r>
+            <a:endParaRPr sz="1100" dirty="0">
+              <a:solidFill>
+                <a:srgbClr val="2D2938"/>
+              </a:solidFill>
+              <a:latin typeface="Calibri"/>
+            </a:endParaRPr>
+          </a:p>
+          <a:p>
+            <a:pPr algn="l">
               <a:spcAft>
-                <a:spcPts val="400"/>
+                <a:spcPts val="300"/>
               </a:spcAft>
             </a:pPr>
             <a:r>
-              <a:rPr sz="1050">
-                <a:solidFill>
-                  <a:srgbClr val="6B6173"/>
-                </a:solidFill>
-                <a:latin typeface="Calibri"/>
-              </a:rPr>
-              <a:t>•  Bestaand distributienetwerk</a:t>
-            </a:r>
-          </a:p>
-          <a:p>
-            <a:pPr>
+              <a:rPr sz="1100" b="1" dirty="0">
+                <a:solidFill>
+                  <a:srgbClr val="2D2938"/>
+                </a:solidFill>
+                <a:latin typeface="Calibri"/>
+              </a:rPr>
+              <a:t>•  </a:t>
+            </a:r>
+            <a:r>
+              <a:rPr sz="1100" dirty="0">
+                <a:solidFill>
+                  <a:srgbClr val="2D2938"/>
+                </a:solidFill>
+                <a:latin typeface="Calibri"/>
+              </a:rPr>
+              <a:t>Minder </a:t>
+            </a:r>
+            <a:r>
+              <a:rPr sz="1100" dirty="0" err="1">
+                <a:solidFill>
+                  <a:srgbClr val="2D2938"/>
+                </a:solidFill>
+                <a:latin typeface="Calibri"/>
+              </a:rPr>
+              <a:t>administratie</a:t>
+            </a:r>
+            <a:endParaRPr sz="1100" dirty="0">
+              <a:solidFill>
+                <a:srgbClr val="2D2938"/>
+              </a:solidFill>
+              <a:latin typeface="Calibri"/>
+            </a:endParaRPr>
+          </a:p>
+          <a:p>
+            <a:pPr algn="l">
               <a:spcAft>
-                <a:spcPts val="400"/>
+                <a:spcPts val="300"/>
               </a:spcAft>
             </a:pPr>
             <a:r>
-              <a:rPr sz="1050">
-                <a:solidFill>
-                  <a:srgbClr val="6B6173"/>
-                </a:solidFill>
-                <a:latin typeface="Calibri"/>
-              </a:rPr>
-              <a:t>•  Niet in huis: tech-engineering → partner</a:t>
-            </a:r>
-          </a:p>
-        </p:txBody>
-      </p:sp>
-      <p:sp>
-        <p:nvSpPr>
-          <p:cNvPr id="14" name="Rounded Rectangle 13"/>
-          <p:cNvSpPr/>
-          <p:nvPr/>
-        </p:nvSpPr>
-        <p:spPr>
-          <a:xfrm>
-            <a:off x="548640" y="4023360"/>
-            <a:ext cx="5486400" cy="2468880"/>
-          </a:xfrm>
-          <a:prstGeom prst="roundRect">
-            <a:avLst>
-              <a:gd name="adj" fmla="val 8000"/>
-            </a:avLst>
-          </a:prstGeom>
-          <a:solidFill>
-            <a:srgbClr val="FFFFFF"/>
-          </a:solidFill>
-          <a:ln w="19050">
-            <a:solidFill>
-              <a:srgbClr val="F59E0B"/>
-            </a:solidFill>
-          </a:ln>
-        </p:spPr>
-        <p:style>
-          <a:lnRef idx="1">
-            <a:schemeClr val="accent1"/>
-          </a:lnRef>
-          <a:fillRef idx="3">
-            <a:schemeClr val="accent1"/>
-          </a:fillRef>
-          <a:effectRef idx="2">
-            <a:schemeClr val="accent1"/>
-          </a:effectRef>
-          <a:fontRef idx="minor">
-            <a:schemeClr val="lt1"/>
-          </a:fontRef>
-        </p:style>
-        <p:txBody>
-          <a:bodyPr rtlCol="0" anchor="ctr"/>
-          <a:lstStyle/>
-          <a:p>
-            <a:pPr algn="ctr"/>
-          </a:p>
-        </p:txBody>
-      </p:sp>
-      <p:sp>
-        <p:nvSpPr>
-          <p:cNvPr id="15" name="Rectangle 14"/>
-          <p:cNvSpPr/>
-          <p:nvPr/>
-        </p:nvSpPr>
-        <p:spPr>
-          <a:xfrm>
-            <a:off x="777240" y="4251960"/>
-            <a:ext cx="320040" cy="45720"/>
-          </a:xfrm>
-          <a:prstGeom prst="rect">
-            <a:avLst/>
-          </a:prstGeom>
-          <a:solidFill>
-            <a:srgbClr val="F59E0B"/>
-          </a:solidFill>
-          <a:ln>
-            <a:noFill/>
-          </a:ln>
-        </p:spPr>
-        <p:style>
-          <a:lnRef idx="1">
-            <a:schemeClr val="accent1"/>
-          </a:lnRef>
-          <a:fillRef idx="3">
-            <a:schemeClr val="accent1"/>
-          </a:fillRef>
-          <a:effectRef idx="2">
-            <a:schemeClr val="accent1"/>
-          </a:effectRef>
-          <a:fontRef idx="minor">
-            <a:schemeClr val="lt1"/>
-          </a:fontRef>
-        </p:style>
-        <p:txBody>
-          <a:bodyPr rtlCol="0" anchor="ctr"/>
-          <a:lstStyle/>
-          <a:p>
-            <a:pPr algn="ctr"/>
-          </a:p>
-        </p:txBody>
-      </p:sp>
-      <p:sp>
-        <p:nvSpPr>
-          <p:cNvPr id="16" name="TextBox 15"/>
+              <a:rPr sz="1100" b="1" dirty="0">
+                <a:solidFill>
+                  <a:srgbClr val="2D2938"/>
+                </a:solidFill>
+                <a:latin typeface="Calibri"/>
+              </a:rPr>
+              <a:t>•  </a:t>
+            </a:r>
+            <a:r>
+              <a:rPr sz="1100" dirty="0" err="1">
+                <a:solidFill>
+                  <a:srgbClr val="2D2938"/>
+                </a:solidFill>
+                <a:latin typeface="Calibri"/>
+              </a:rPr>
+              <a:t>Vertrouwen</a:t>
+            </a:r>
+            <a:r>
+              <a:rPr sz="1100" dirty="0">
+                <a:solidFill>
+                  <a:srgbClr val="2D2938"/>
+                </a:solidFill>
+                <a:latin typeface="Calibri"/>
+              </a:rPr>
+              <a:t> </a:t>
+            </a:r>
+            <a:r>
+              <a:rPr sz="1100" dirty="0" err="1">
+                <a:solidFill>
+                  <a:srgbClr val="2D2938"/>
+                </a:solidFill>
+                <a:latin typeface="Calibri"/>
+              </a:rPr>
+              <a:t>eindklant</a:t>
+            </a:r>
+            <a:endParaRPr sz="1100" dirty="0">
+              <a:solidFill>
+                <a:srgbClr val="2D2938"/>
+              </a:solidFill>
+              <a:latin typeface="Calibri"/>
+            </a:endParaRPr>
+          </a:p>
+        </p:txBody>
+      </p:sp>
+      <p:sp>
+        <p:nvSpPr>
+          <p:cNvPr id="27" name="TextBox 26"/>
           <p:cNvSpPr txBox="1"/>
           <p:nvPr/>
         </p:nvSpPr>
         <p:spPr>
           <a:xfrm>
-            <a:off x="777240" y="4343400"/>
-            <a:ext cx="5029200" cy="320040"/>
+            <a:off x="6918960" y="4665803"/>
+            <a:ext cx="2011680" cy="1005840"/>
           </a:xfrm>
           <a:prstGeom prst="rect">
             <a:avLst/>
@@ -4029,34 +5464,299 @@
           <a:noFill/>
         </p:spPr>
         <p:txBody>
-          <a:bodyPr wrap="square" lIns="0" rIns="0" tIns="0" bIns="0">
+          <a:bodyPr wrap="square" lIns="0" tIns="0" rIns="0" bIns="0">
             <a:spAutoFit/>
           </a:bodyPr>
           <a:lstStyle/>
           <a:p>
-            <a:pPr algn="l"/>
-            <a:r>
-              <a:rPr sz="1300" b="1">
-                <a:solidFill>
-                  <a:srgbClr val="2D2938"/>
-                </a:solidFill>
-                <a:latin typeface="Calibri"/>
-              </a:rPr>
-              <a:t>Technische fit</a:t>
-            </a:r>
-          </a:p>
-        </p:txBody>
-      </p:sp>
-      <p:sp>
-        <p:nvSpPr>
-          <p:cNvPr id="17" name="TextBox 16"/>
+            <a:pPr algn="l">
+              <a:spcAft>
+                <a:spcPts val="300"/>
+              </a:spcAft>
+            </a:pPr>
+            <a:r>
+              <a:rPr sz="1100" b="1" dirty="0">
+                <a:solidFill>
+                  <a:srgbClr val="2D2938"/>
+                </a:solidFill>
+                <a:latin typeface="Calibri"/>
+              </a:rPr>
+              <a:t>•  </a:t>
+            </a:r>
+            <a:r>
+              <a:rPr sz="1100" dirty="0" err="1">
+                <a:solidFill>
+                  <a:srgbClr val="2D2938"/>
+                </a:solidFill>
+                <a:latin typeface="Calibri"/>
+              </a:rPr>
+              <a:t>Vervalsing</a:t>
+            </a:r>
+            <a:r>
+              <a:rPr sz="1100" dirty="0">
+                <a:solidFill>
+                  <a:srgbClr val="2D2938"/>
+                </a:solidFill>
+                <a:latin typeface="Calibri"/>
+              </a:rPr>
+              <a:t> </a:t>
+            </a:r>
+            <a:r>
+              <a:rPr sz="1100" dirty="0" err="1">
+                <a:solidFill>
+                  <a:srgbClr val="2D2938"/>
+                </a:solidFill>
+                <a:latin typeface="Calibri"/>
+              </a:rPr>
+              <a:t>lastig</a:t>
+            </a:r>
+            <a:r>
+              <a:rPr sz="1100" dirty="0">
+                <a:solidFill>
+                  <a:srgbClr val="2D2938"/>
+                </a:solidFill>
+                <a:latin typeface="Calibri"/>
+              </a:rPr>
+              <a:t> </a:t>
+            </a:r>
+            <a:r>
+              <a:rPr sz="1100" dirty="0" err="1">
+                <a:solidFill>
+                  <a:srgbClr val="2D2938"/>
+                </a:solidFill>
+                <a:latin typeface="Calibri"/>
+              </a:rPr>
+              <a:t>bewijsbaar</a:t>
+            </a:r>
+            <a:endParaRPr sz="1100" dirty="0">
+              <a:solidFill>
+                <a:srgbClr val="2D2938"/>
+              </a:solidFill>
+              <a:latin typeface="Calibri"/>
+            </a:endParaRPr>
+          </a:p>
+          <a:p>
+            <a:pPr algn="l">
+              <a:spcAft>
+                <a:spcPts val="300"/>
+              </a:spcAft>
+            </a:pPr>
+            <a:r>
+              <a:rPr sz="1100" b="1" dirty="0">
+                <a:solidFill>
+                  <a:srgbClr val="2D2938"/>
+                </a:solidFill>
+                <a:latin typeface="Calibri"/>
+              </a:rPr>
+              <a:t>•  </a:t>
+            </a:r>
+            <a:r>
+              <a:rPr sz="1100" dirty="0" err="1">
+                <a:solidFill>
+                  <a:srgbClr val="2D2938"/>
+                </a:solidFill>
+                <a:latin typeface="Calibri"/>
+              </a:rPr>
+              <a:t>Visuele</a:t>
+            </a:r>
+            <a:r>
+              <a:rPr sz="1100" dirty="0">
+                <a:solidFill>
+                  <a:srgbClr val="2D2938"/>
+                </a:solidFill>
+                <a:latin typeface="Calibri"/>
+              </a:rPr>
+              <a:t> ID-check </a:t>
+            </a:r>
+            <a:r>
+              <a:rPr sz="1100" dirty="0" err="1">
+                <a:solidFill>
+                  <a:srgbClr val="2D2938"/>
+                </a:solidFill>
+                <a:latin typeface="Calibri"/>
+              </a:rPr>
+              <a:t>foutgevoelig</a:t>
+            </a:r>
+            <a:endParaRPr sz="1100" dirty="0">
+              <a:solidFill>
+                <a:srgbClr val="2D2938"/>
+              </a:solidFill>
+              <a:latin typeface="Calibri"/>
+            </a:endParaRPr>
+          </a:p>
+          <a:p>
+            <a:pPr algn="l">
+              <a:spcAft>
+                <a:spcPts val="300"/>
+              </a:spcAft>
+            </a:pPr>
+            <a:r>
+              <a:rPr sz="1100" b="1" dirty="0">
+                <a:solidFill>
+                  <a:srgbClr val="2D2938"/>
+                </a:solidFill>
+                <a:latin typeface="Calibri"/>
+              </a:rPr>
+              <a:t>•  </a:t>
+            </a:r>
+            <a:r>
+              <a:rPr sz="1100" dirty="0">
+                <a:solidFill>
+                  <a:srgbClr val="2D2938"/>
+                </a:solidFill>
+                <a:latin typeface="Calibri"/>
+              </a:rPr>
+              <a:t>Scan </a:t>
+            </a:r>
+            <a:r>
+              <a:rPr sz="1100" dirty="0" err="1">
+                <a:solidFill>
+                  <a:srgbClr val="2D2938"/>
+                </a:solidFill>
+                <a:latin typeface="Calibri"/>
+              </a:rPr>
+              <a:t>niet</a:t>
+            </a:r>
+            <a:r>
+              <a:rPr sz="1100" dirty="0">
+                <a:solidFill>
+                  <a:srgbClr val="2D2938"/>
+                </a:solidFill>
+                <a:latin typeface="Calibri"/>
+              </a:rPr>
+              <a:t> </a:t>
+            </a:r>
+            <a:r>
+              <a:rPr sz="1100" dirty="0" err="1">
+                <a:solidFill>
+                  <a:srgbClr val="2D2938"/>
+                </a:solidFill>
+                <a:latin typeface="Calibri"/>
+              </a:rPr>
+              <a:t>rechtsgeldig</a:t>
+            </a:r>
+            <a:endParaRPr sz="1100" dirty="0">
+              <a:solidFill>
+                <a:srgbClr val="2D2938"/>
+              </a:solidFill>
+              <a:latin typeface="Calibri"/>
+            </a:endParaRPr>
+          </a:p>
+          <a:p>
+            <a:pPr algn="l">
+              <a:spcAft>
+                <a:spcPts val="300"/>
+              </a:spcAft>
+            </a:pPr>
+            <a:r>
+              <a:rPr sz="1100" b="1" dirty="0">
+                <a:solidFill>
+                  <a:srgbClr val="2D2938"/>
+                </a:solidFill>
+                <a:latin typeface="Calibri"/>
+              </a:rPr>
+              <a:t>•  </a:t>
+            </a:r>
+            <a:r>
+              <a:rPr sz="1100" dirty="0" err="1">
+                <a:solidFill>
+                  <a:srgbClr val="2D2938"/>
+                </a:solidFill>
+                <a:latin typeface="Calibri"/>
+              </a:rPr>
+              <a:t>Fraude</a:t>
+            </a:r>
+            <a:r>
+              <a:rPr sz="1100" dirty="0">
+                <a:solidFill>
+                  <a:srgbClr val="2D2938"/>
+                </a:solidFill>
+                <a:latin typeface="Calibri"/>
+              </a:rPr>
+              <a:t> </a:t>
+            </a:r>
+            <a:r>
+              <a:rPr sz="1100" dirty="0" err="1">
+                <a:solidFill>
+                  <a:srgbClr val="2D2938"/>
+                </a:solidFill>
+                <a:latin typeface="Calibri"/>
+              </a:rPr>
+              <a:t>komt</a:t>
+            </a:r>
+            <a:r>
+              <a:rPr sz="1100" dirty="0">
+                <a:solidFill>
+                  <a:srgbClr val="2D2938"/>
+                </a:solidFill>
+                <a:latin typeface="Calibri"/>
+              </a:rPr>
+              <a:t> </a:t>
+            </a:r>
+            <a:r>
+              <a:rPr sz="1100" dirty="0" err="1">
+                <a:solidFill>
+                  <a:srgbClr val="2D2938"/>
+                </a:solidFill>
+                <a:latin typeface="Calibri"/>
+              </a:rPr>
+              <a:t>laat</a:t>
+            </a:r>
+            <a:r>
+              <a:rPr sz="1100" dirty="0">
+                <a:solidFill>
+                  <a:srgbClr val="2D2938"/>
+                </a:solidFill>
+                <a:latin typeface="Calibri"/>
+              </a:rPr>
+              <a:t> </a:t>
+            </a:r>
+            <a:r>
+              <a:rPr sz="1100" dirty="0" err="1">
+                <a:solidFill>
+                  <a:srgbClr val="2D2938"/>
+                </a:solidFill>
+                <a:latin typeface="Calibri"/>
+              </a:rPr>
+              <a:t>aan</a:t>
+            </a:r>
+            <a:r>
+              <a:rPr sz="1100" dirty="0">
+                <a:solidFill>
+                  <a:srgbClr val="2D2938"/>
+                </a:solidFill>
+                <a:latin typeface="Calibri"/>
+              </a:rPr>
+              <a:t> </a:t>
+            </a:r>
+            <a:r>
+              <a:rPr sz="1100" dirty="0" err="1">
+                <a:solidFill>
+                  <a:srgbClr val="2D2938"/>
+                </a:solidFill>
+                <a:latin typeface="Calibri"/>
+              </a:rPr>
+              <a:t>licht</a:t>
+            </a:r>
+            <a:endParaRPr sz="1100" dirty="0">
+              <a:solidFill>
+                <a:srgbClr val="2D2938"/>
+              </a:solidFill>
+              <a:latin typeface="Calibri"/>
+            </a:endParaRPr>
+          </a:p>
+        </p:txBody>
+      </p:sp>
+      <p:sp>
+        <p:nvSpPr>
+          <p:cNvPr id="28" name="TextBox 27"/>
           <p:cNvSpPr txBox="1"/>
           <p:nvPr/>
         </p:nvSpPr>
         <p:spPr>
           <a:xfrm>
-            <a:off x="777240" y="4754880"/>
-            <a:ext cx="5029200" cy="1645920"/>
+            <a:off x="9218602" y="3717920"/>
+            <a:ext cx="2468880" cy="854080"/>
           </a:xfrm>
           <a:prstGeom prst="rect">
             <a:avLst/>
@@ -4064,1130 +5764,493 @@
           <a:noFill/>
         </p:spPr>
         <p:txBody>
-          <a:bodyPr wrap="square" lIns="0" rIns="0" tIns="0" bIns="0">
+          <a:bodyPr wrap="square" lIns="0" tIns="0" rIns="0" bIns="0">
             <a:spAutoFit/>
           </a:bodyPr>
           <a:lstStyle/>
           <a:p>
+            <a:pPr algn="l">
+              <a:spcAft>
+                <a:spcPts val="300"/>
+              </a:spcAft>
+            </a:pPr>
+            <a:r>
+              <a:rPr sz="1200" b="1" dirty="0">
+                <a:solidFill>
+                  <a:srgbClr val="2D2938"/>
+                </a:solidFill>
+                <a:latin typeface="Calibri"/>
+              </a:rPr>
+              <a:t>•  </a:t>
+            </a:r>
+            <a:r>
+              <a:rPr sz="1200" dirty="0" err="1">
+                <a:solidFill>
+                  <a:srgbClr val="2D2938"/>
+                </a:solidFill>
+                <a:latin typeface="Calibri"/>
+              </a:rPr>
+              <a:t>Juiste</a:t>
+            </a:r>
+            <a:r>
+              <a:rPr sz="1200" dirty="0">
+                <a:solidFill>
+                  <a:srgbClr val="2D2938"/>
+                </a:solidFill>
+                <a:latin typeface="Calibri"/>
+              </a:rPr>
+              <a:t> </a:t>
+            </a:r>
+            <a:r>
+              <a:rPr sz="1200" dirty="0" err="1">
+                <a:solidFill>
+                  <a:srgbClr val="2D2938"/>
+                </a:solidFill>
+                <a:latin typeface="Calibri"/>
+              </a:rPr>
+              <a:t>persoon</a:t>
+            </a:r>
+            <a:r>
+              <a:rPr sz="1200" dirty="0">
+                <a:solidFill>
+                  <a:srgbClr val="2D2938"/>
+                </a:solidFill>
+                <a:latin typeface="Calibri"/>
+              </a:rPr>
+              <a:t> </a:t>
+            </a:r>
+            <a:r>
+              <a:rPr sz="1200" dirty="0" err="1">
+                <a:solidFill>
+                  <a:srgbClr val="2D2938"/>
+                </a:solidFill>
+                <a:latin typeface="Calibri"/>
+              </a:rPr>
+              <a:t>tekent</a:t>
+            </a:r>
+            <a:endParaRPr lang="en-US" sz="1200" dirty="0">
+              <a:solidFill>
+                <a:srgbClr val="2D2938"/>
+              </a:solidFill>
+              <a:latin typeface="Calibri"/>
+            </a:endParaRPr>
+          </a:p>
+          <a:p>
             <a:pPr>
               <a:spcAft>
-                <a:spcPts val="400"/>
+                <a:spcPts val="300"/>
               </a:spcAft>
             </a:pPr>
             <a:r>
-              <a:rPr sz="1050">
-                <a:solidFill>
-                  <a:srgbClr val="6B6173"/>
-                </a:solidFill>
-                <a:latin typeface="Calibri"/>
-              </a:rPr>
-              <a:t>•  Aurora levert kennismodel + merk</a:t>
-            </a:r>
-          </a:p>
-          <a:p>
-            <a:pPr>
+              <a:rPr lang="nl-NL" sz="1200" b="1" dirty="0">
+                <a:solidFill>
+                  <a:srgbClr val="2D2938"/>
+                </a:solidFill>
+              </a:rPr>
+              <a:t>•  </a:t>
+            </a:r>
+            <a:r>
+              <a:rPr lang="nl-NL" sz="1200" dirty="0">
+                <a:solidFill>
+                  <a:srgbClr val="2D2938"/>
+                </a:solidFill>
+              </a:rPr>
+              <a:t>Rechtsgeldig laten ondertekenen</a:t>
+            </a:r>
+            <a:endParaRPr sz="1200" dirty="0">
+              <a:solidFill>
+                <a:srgbClr val="2D2938"/>
+              </a:solidFill>
+              <a:latin typeface="Calibri"/>
+            </a:endParaRPr>
+          </a:p>
+          <a:p>
+            <a:pPr algn="l">
               <a:spcAft>
-                <a:spcPts val="400"/>
+                <a:spcPts val="300"/>
               </a:spcAft>
             </a:pPr>
             <a:r>
-              <a:rPr sz="1050">
-                <a:solidFill>
-                  <a:srgbClr val="6B6173"/>
-                </a:solidFill>
-                <a:latin typeface="Calibri"/>
-              </a:rPr>
-              <a:t>•  Techpartner levert infrastructuur</a:t>
-            </a:r>
-          </a:p>
-          <a:p>
-            <a:pPr>
+              <a:rPr sz="1200" b="1" dirty="0">
+                <a:solidFill>
+                  <a:srgbClr val="2D2938"/>
+                </a:solidFill>
+                <a:latin typeface="Calibri"/>
+              </a:rPr>
+              <a:t>•  </a:t>
+            </a:r>
+            <a:r>
+              <a:rPr sz="1200" dirty="0" err="1">
+                <a:solidFill>
+                  <a:srgbClr val="2D2938"/>
+                </a:solidFill>
+                <a:latin typeface="Calibri"/>
+              </a:rPr>
+              <a:t>Audittrail</a:t>
+            </a:r>
+            <a:r>
+              <a:rPr sz="1200" dirty="0">
+                <a:solidFill>
+                  <a:srgbClr val="2D2938"/>
+                </a:solidFill>
+                <a:latin typeface="Calibri"/>
+              </a:rPr>
+              <a:t> </a:t>
+            </a:r>
+            <a:r>
+              <a:rPr sz="1200" dirty="0" err="1">
+                <a:solidFill>
+                  <a:srgbClr val="2D2938"/>
+                </a:solidFill>
+                <a:latin typeface="Calibri"/>
+              </a:rPr>
+              <a:t>voor</a:t>
+            </a:r>
+            <a:r>
+              <a:rPr sz="1200" dirty="0">
+                <a:solidFill>
+                  <a:srgbClr val="2D2938"/>
+                </a:solidFill>
+                <a:latin typeface="Calibri"/>
+              </a:rPr>
+              <a:t> compliance</a:t>
+            </a:r>
+          </a:p>
+          <a:p>
+            <a:pPr algn="l">
               <a:spcAft>
-                <a:spcPts val="400"/>
+                <a:spcPts val="300"/>
               </a:spcAft>
             </a:pPr>
             <a:r>
-              <a:rPr sz="1050">
-                <a:solidFill>
-                  <a:srgbClr val="6B6173"/>
-                </a:solidFill>
-                <a:latin typeface="Calibri"/>
-              </a:rPr>
-              <a:t>•  Hergebruik: ID-scan, NFC, PIN</a:t>
-            </a:r>
-          </a:p>
-          <a:p>
-            <a:pPr>
-              <a:spcAft>
-                <a:spcPts val="400"/>
-              </a:spcAft>
-            </a:pPr>
-            <a:r>
-              <a:rPr sz="1050">
-                <a:solidFill>
-                  <a:srgbClr val="6B6173"/>
-                </a:solidFill>
-                <a:latin typeface="Calibri"/>
-              </a:rPr>
-              <a:t>•  Protocol koppelt handtekening aan code</a:t>
-            </a:r>
-          </a:p>
-        </p:txBody>
-      </p:sp>
-      <p:sp>
-        <p:nvSpPr>
-          <p:cNvPr id="18" name="Rounded Rectangle 17"/>
-          <p:cNvSpPr/>
+              <a:rPr sz="1200" b="1" dirty="0">
+                <a:solidFill>
+                  <a:srgbClr val="2D2938"/>
+                </a:solidFill>
+                <a:latin typeface="Calibri"/>
+              </a:rPr>
+              <a:t>•  </a:t>
+            </a:r>
+            <a:r>
+              <a:rPr sz="1200" dirty="0" err="1">
+                <a:solidFill>
+                  <a:srgbClr val="2D2938"/>
+                </a:solidFill>
+                <a:latin typeface="Calibri"/>
+              </a:rPr>
+              <a:t>Klanten</a:t>
+            </a:r>
+            <a:r>
+              <a:rPr sz="1200" dirty="0">
+                <a:solidFill>
+                  <a:srgbClr val="2D2938"/>
+                </a:solidFill>
+                <a:latin typeface="Calibri"/>
+              </a:rPr>
+              <a:t> </a:t>
+            </a:r>
+            <a:r>
+              <a:rPr sz="1200" dirty="0" err="1">
+                <a:solidFill>
+                  <a:srgbClr val="2D2938"/>
+                </a:solidFill>
+                <a:latin typeface="Calibri"/>
+              </a:rPr>
+              <a:t>snel</a:t>
+            </a:r>
+            <a:r>
+              <a:rPr sz="1200" dirty="0">
+                <a:solidFill>
+                  <a:srgbClr val="2D2938"/>
+                </a:solidFill>
+                <a:latin typeface="Calibri"/>
+              </a:rPr>
+              <a:t> </a:t>
+            </a:r>
+            <a:r>
+              <a:rPr sz="1200" dirty="0" err="1">
+                <a:solidFill>
+                  <a:srgbClr val="2D2938"/>
+                </a:solidFill>
+                <a:latin typeface="Calibri"/>
+              </a:rPr>
+              <a:t>bedienen</a:t>
+            </a:r>
+            <a:endParaRPr sz="1200" dirty="0">
+              <a:solidFill>
+                <a:srgbClr val="2D2938"/>
+              </a:solidFill>
+              <a:latin typeface="Calibri"/>
+            </a:endParaRPr>
+          </a:p>
+        </p:txBody>
+      </p:sp>
+      <p:cxnSp>
+        <p:nvCxnSpPr>
+          <p:cNvPr id="30" name="Rechte verbindingslijn 29">
+            <a:extLst>
+              <a:ext uri="{FF2B5EF4-FFF2-40B4-BE49-F238E27FC236}">
+                <a16:creationId xmlns:a16="http://schemas.microsoft.com/office/drawing/2014/main" id="{E841159D-947C-68FC-C154-C6FBA566BB56}"/>
+              </a:ext>
+            </a:extLst>
+          </p:cNvPr>
+          <p:cNvCxnSpPr>
+            <a:stCxn id="8" idx="0"/>
+          </p:cNvCxnSpPr>
           <p:nvPr/>
-        </p:nvSpPr>
-        <p:spPr>
-          <a:xfrm>
-            <a:off x="6172200" y="4023360"/>
-            <a:ext cx="5486400" cy="2468880"/>
-          </a:xfrm>
-          <a:prstGeom prst="roundRect">
-            <a:avLst>
-              <a:gd name="adj" fmla="val 8000"/>
-            </a:avLst>
+        </p:nvCxnSpPr>
+        <p:spPr>
+          <a:xfrm flipH="1">
+            <a:off x="3154680" y="1600200"/>
+            <a:ext cx="45720" cy="4937760"/>
+          </a:xfrm>
+          <a:prstGeom prst="line">
+            <a:avLst/>
           </a:prstGeom>
-          <a:solidFill>
-            <a:srgbClr val="FFFFFF"/>
-          </a:solidFill>
-          <a:ln w="19050">
-            <a:solidFill>
-              <a:srgbClr val="F59E0B"/>
-            </a:solidFill>
-          </a:ln>
         </p:spPr>
         <p:style>
-          <a:lnRef idx="1">
-            <a:schemeClr val="accent1"/>
+          <a:lnRef idx="2">
+            <a:schemeClr val="dk1"/>
           </a:lnRef>
-          <a:fillRef idx="3">
-            <a:schemeClr val="accent1"/>
+          <a:fillRef idx="0">
+            <a:schemeClr val="dk1"/>
           </a:fillRef>
-          <a:effectRef idx="2">
-            <a:schemeClr val="accent1"/>
+          <a:effectRef idx="1">
+            <a:schemeClr val="dk1"/>
           </a:effectRef>
           <a:fontRef idx="minor">
-            <a:schemeClr val="lt1"/>
+            <a:schemeClr val="tx1"/>
           </a:fontRef>
         </p:style>
-        <p:txBody>
-          <a:bodyPr rtlCol="0" anchor="ctr"/>
-          <a:lstStyle/>
-          <a:p>
-            <a:pPr algn="ctr"/>
-          </a:p>
-        </p:txBody>
-      </p:sp>
-      <p:sp>
-        <p:nvSpPr>
-          <p:cNvPr id="19" name="Rectangle 18"/>
-          <p:cNvSpPr/>
+      </p:cxnSp>
+      <p:cxnSp>
+        <p:nvCxnSpPr>
+          <p:cNvPr id="32" name="Rechte verbindingslijn 31">
+            <a:extLst>
+              <a:ext uri="{FF2B5EF4-FFF2-40B4-BE49-F238E27FC236}">
+                <a16:creationId xmlns:a16="http://schemas.microsoft.com/office/drawing/2014/main" id="{96802357-65A0-93BB-9590-2F4F65AE0CBC}"/>
+              </a:ext>
+            </a:extLst>
+          </p:cNvPr>
+          <p:cNvCxnSpPr>
+            <a:cxnSpLocks/>
+            <a:endCxn id="8" idx="3"/>
+          </p:cNvCxnSpPr>
           <p:nvPr/>
-        </p:nvSpPr>
-        <p:spPr>
-          <a:xfrm>
-            <a:off x="6400800" y="4251960"/>
-            <a:ext cx="320040" cy="45720"/>
+        </p:nvCxnSpPr>
+        <p:spPr>
+          <a:xfrm>
+            <a:off x="3200400" y="4069080"/>
+            <a:ext cx="2788920" cy="0"/>
+          </a:xfrm>
+          <a:prstGeom prst="line">
+            <a:avLst/>
+          </a:prstGeom>
+        </p:spPr>
+        <p:style>
+          <a:lnRef idx="2">
+            <a:schemeClr val="dk1"/>
+          </a:lnRef>
+          <a:fillRef idx="0">
+            <a:schemeClr val="dk1"/>
+          </a:fillRef>
+          <a:effectRef idx="1">
+            <a:schemeClr val="dk1"/>
+          </a:effectRef>
+          <a:fontRef idx="minor">
+            <a:schemeClr val="tx1"/>
+          </a:fontRef>
+        </p:style>
+      </p:cxnSp>
+      <p:cxnSp>
+        <p:nvCxnSpPr>
+          <p:cNvPr id="34" name="Rechte verbindingslijn 33">
+            <a:extLst>
+              <a:ext uri="{FF2B5EF4-FFF2-40B4-BE49-F238E27FC236}">
+                <a16:creationId xmlns:a16="http://schemas.microsoft.com/office/drawing/2014/main" id="{2E04DC71-1B08-0AC3-A328-E1EB7E0CACFE}"/>
+              </a:ext>
+            </a:extLst>
+          </p:cNvPr>
+          <p:cNvCxnSpPr>
+            <a:cxnSpLocks/>
+            <a:endCxn id="19" idx="7"/>
+          </p:cNvCxnSpPr>
+          <p:nvPr/>
+        </p:nvCxnSpPr>
+        <p:spPr>
+          <a:xfrm flipV="1">
+            <a:off x="8839200" y="2323318"/>
+            <a:ext cx="1776242" cy="1745762"/>
+          </a:xfrm>
+          <a:prstGeom prst="line">
+            <a:avLst/>
+          </a:prstGeom>
+        </p:spPr>
+        <p:style>
+          <a:lnRef idx="2">
+            <a:schemeClr val="dk1"/>
+          </a:lnRef>
+          <a:fillRef idx="0">
+            <a:schemeClr val="dk1"/>
+          </a:fillRef>
+          <a:effectRef idx="1">
+            <a:schemeClr val="dk1"/>
+          </a:effectRef>
+          <a:fontRef idx="minor">
+            <a:schemeClr val="tx1"/>
+          </a:fontRef>
+        </p:style>
+      </p:cxnSp>
+      <p:cxnSp>
+        <p:nvCxnSpPr>
+          <p:cNvPr id="37" name="Rechte verbindingslijn 36">
+            <a:extLst>
+              <a:ext uri="{FF2B5EF4-FFF2-40B4-BE49-F238E27FC236}">
+                <a16:creationId xmlns:a16="http://schemas.microsoft.com/office/drawing/2014/main" id="{EF9CA1AE-BFC3-52EA-FE95-BBAE0AEDEDFF}"/>
+              </a:ext>
+            </a:extLst>
+          </p:cNvPr>
+          <p:cNvCxnSpPr>
+            <a:cxnSpLocks/>
+            <a:endCxn id="19" idx="5"/>
+          </p:cNvCxnSpPr>
+          <p:nvPr/>
+        </p:nvCxnSpPr>
+        <p:spPr>
+          <a:xfrm>
+            <a:off x="8839200" y="4069080"/>
+            <a:ext cx="1776242" cy="1745762"/>
+          </a:xfrm>
+          <a:prstGeom prst="line">
+            <a:avLst/>
+          </a:prstGeom>
+        </p:spPr>
+        <p:style>
+          <a:lnRef idx="2">
+            <a:schemeClr val="dk1"/>
+          </a:lnRef>
+          <a:fillRef idx="0">
+            <a:schemeClr val="dk1"/>
+          </a:fillRef>
+          <a:effectRef idx="1">
+            <a:schemeClr val="dk1"/>
+          </a:effectRef>
+          <a:fontRef idx="minor">
+            <a:schemeClr val="tx1"/>
+          </a:fontRef>
+        </p:style>
+      </p:cxnSp>
+      <p:cxnSp>
+        <p:nvCxnSpPr>
+          <p:cNvPr id="40" name="Rechte verbindingslijn 39">
+            <a:extLst>
+              <a:ext uri="{FF2B5EF4-FFF2-40B4-BE49-F238E27FC236}">
+                <a16:creationId xmlns:a16="http://schemas.microsoft.com/office/drawing/2014/main" id="{92EB5733-71E0-5A2D-8CCD-387F70E8FA2D}"/>
+              </a:ext>
+            </a:extLst>
+          </p:cNvPr>
+          <p:cNvCxnSpPr>
+            <a:cxnSpLocks/>
+            <a:stCxn id="19" idx="2"/>
+          </p:cNvCxnSpPr>
+          <p:nvPr/>
+        </p:nvCxnSpPr>
+        <p:spPr>
+          <a:xfrm>
+            <a:off x="6400800" y="4069080"/>
+            <a:ext cx="2468880" cy="0"/>
+          </a:xfrm>
+          <a:prstGeom prst="line">
+            <a:avLst/>
+          </a:prstGeom>
+        </p:spPr>
+        <p:style>
+          <a:lnRef idx="2">
+            <a:schemeClr val="dk1"/>
+          </a:lnRef>
+          <a:fillRef idx="0">
+            <a:schemeClr val="dk1"/>
+          </a:fillRef>
+          <a:effectRef idx="1">
+            <a:schemeClr val="dk1"/>
+          </a:effectRef>
+          <a:fontRef idx="minor">
+            <a:schemeClr val="tx1"/>
+          </a:fontRef>
+        </p:style>
+      </p:cxnSp>
+      <p:pic>
+        <p:nvPicPr>
+          <p:cNvPr id="43" name="Graphic 42" descr="Gebruiker silhouet">
+            <a:extLst>
+              <a:ext uri="{FF2B5EF4-FFF2-40B4-BE49-F238E27FC236}">
+                <a16:creationId xmlns:a16="http://schemas.microsoft.com/office/drawing/2014/main" id="{5636DD46-2E93-0BB5-F0D1-3592E8379BA5}"/>
+              </a:ext>
+            </a:extLst>
+          </p:cNvPr>
+          <p:cNvPicPr>
+            <a:picLocks noChangeAspect="1"/>
+          </p:cNvPicPr>
+          <p:nvPr/>
+        </p:nvPicPr>
+        <p:blipFill>
+          <a:blip>
+            <a:extLst>
+              <a:ext uri="{96DAC541-7B7A-43D3-8B79-37D633B846F1}">
+                <asvg:svgBlip xmlns:asvg="http://schemas.microsoft.com/office/drawing/2016/SVG/main" r:embed="rId2"/>
+              </a:ext>
+            </a:extLst>
+          </a:blip>
+          <a:stretch>
+            <a:fillRect/>
+          </a:stretch>
+        </p:blipFill>
+        <p:spPr>
+          <a:xfrm>
+            <a:off x="9121922" y="1783080"/>
+            <a:ext cx="914400" cy="914400"/>
           </a:xfrm>
           <a:prstGeom prst="rect">
             <a:avLst/>
           </a:prstGeom>
-          <a:solidFill>
-            <a:srgbClr val="F59E0B"/>
-          </a:solidFill>
-          <a:ln>
-            <a:noFill/>
-          </a:ln>
-        </p:spPr>
-        <p:style>
-          <a:lnRef idx="1">
-            <a:schemeClr val="accent1"/>
-          </a:lnRef>
-          <a:fillRef idx="3">
-            <a:schemeClr val="accent1"/>
-          </a:fillRef>
-          <a:effectRef idx="2">
-            <a:schemeClr val="accent1"/>
-          </a:effectRef>
-          <a:fontRef idx="minor">
-            <a:schemeClr val="lt1"/>
-          </a:fontRef>
-        </p:style>
-        <p:txBody>
-          <a:bodyPr rtlCol="0" anchor="ctr"/>
-          <a:lstStyle/>
-          <a:p>
-            <a:pPr algn="ctr"/>
-          </a:p>
-        </p:txBody>
-      </p:sp>
-      <p:sp>
-        <p:nvSpPr>
-          <p:cNvPr id="20" name="TextBox 19"/>
-          <p:cNvSpPr txBox="1"/>
+        </p:spPr>
+      </p:pic>
+      <p:pic>
+        <p:nvPicPr>
+          <p:cNvPr id="45" name="Graphic 44" descr="Cadeau silhouet">
+            <a:extLst>
+              <a:ext uri="{FF2B5EF4-FFF2-40B4-BE49-F238E27FC236}">
+                <a16:creationId xmlns:a16="http://schemas.microsoft.com/office/drawing/2014/main" id="{E51741A4-D742-7E0A-6BD5-DB0E52219862}"/>
+              </a:ext>
+            </a:extLst>
+          </p:cNvPr>
+          <p:cNvPicPr>
+            <a:picLocks noChangeAspect="1"/>
+          </p:cNvPicPr>
           <p:nvPr/>
-        </p:nvSpPr>
-        <p:spPr>
-          <a:xfrm>
-            <a:off x="6400800" y="4343400"/>
-            <a:ext cx="5029200" cy="320040"/>
+        </p:nvPicPr>
+        <p:blipFill>
+          <a:blip>
+            <a:extLst>
+              <a:ext uri="{96DAC541-7B7A-43D3-8B79-37D633B846F1}">
+                <asvg:svgBlip xmlns:asvg="http://schemas.microsoft.com/office/drawing/2016/SVG/main" r:embed="rId3"/>
+              </a:ext>
+            </a:extLst>
+          </a:blip>
+          <a:stretch>
+            <a:fillRect/>
+          </a:stretch>
+        </p:blipFill>
+        <p:spPr>
+          <a:xfrm>
+            <a:off x="411480" y="1563624"/>
+            <a:ext cx="914400" cy="914400"/>
           </a:xfrm>
           <a:prstGeom prst="rect">
             <a:avLst/>
           </a:prstGeom>
-          <a:noFill/>
-        </p:spPr>
-        <p:txBody>
-          <a:bodyPr wrap="square" lIns="0" rIns="0" tIns="0" bIns="0">
-            <a:spAutoFit/>
-          </a:bodyPr>
-          <a:lstStyle/>
-          <a:p>
-            <a:pPr algn="l"/>
-            <a:r>
-              <a:rPr sz="1300" b="1">
-                <a:solidFill>
-                  <a:srgbClr val="2D2938"/>
-                </a:solidFill>
-                <a:latin typeface="Calibri"/>
-              </a:rPr>
-              <a:t>Concurrentievoordeel — nieuwe markt</a:t>
-            </a:r>
-          </a:p>
-        </p:txBody>
-      </p:sp>
-      <p:sp>
-        <p:nvSpPr>
-          <p:cNvPr id="21" name="TextBox 20"/>
-          <p:cNvSpPr txBox="1"/>
-          <p:nvPr/>
-        </p:nvSpPr>
-        <p:spPr>
-          <a:xfrm>
-            <a:off x="6400800" y="4754880"/>
-            <a:ext cx="5029200" cy="1645920"/>
-          </a:xfrm>
-          <a:prstGeom prst="rect">
-            <a:avLst/>
-          </a:prstGeom>
-          <a:noFill/>
-        </p:spPr>
-        <p:txBody>
-          <a:bodyPr wrap="square" lIns="0" rIns="0" tIns="0" bIns="0">
-            <a:spAutoFit/>
-          </a:bodyPr>
-          <a:lstStyle/>
-          <a:p>
-            <a:pPr>
-              <a:spcAft>
-                <a:spcPts val="400"/>
-              </a:spcAft>
-            </a:pPr>
-            <a:r>
-              <a:rPr sz="1050">
-                <a:solidFill>
-                  <a:srgbClr val="6B6173"/>
-                </a:solidFill>
-                <a:latin typeface="Calibri"/>
-              </a:rPr>
-              <a:t>•  DocuSign/PKI: 100% digitaal</a:t>
-            </a:r>
-          </a:p>
-          <a:p>
-            <a:pPr>
-              <a:spcAft>
-                <a:spcPts val="400"/>
-              </a:spcAft>
-            </a:pPr>
-            <a:r>
-              <a:rPr sz="1050">
-                <a:solidFill>
-                  <a:srgbClr val="6B6173"/>
-                </a:solidFill>
-                <a:latin typeface="Calibri"/>
-              </a:rPr>
-              <a:t>•  DigiD: overheidsgebonden</a:t>
-            </a:r>
-          </a:p>
-          <a:p>
-            <a:pPr>
-              <a:spcAft>
-                <a:spcPts val="400"/>
-              </a:spcAft>
-            </a:pPr>
-            <a:r>
-              <a:rPr sz="1050">
-                <a:solidFill>
-                  <a:srgbClr val="6B6173"/>
-                </a:solidFill>
-                <a:latin typeface="Calibri"/>
-              </a:rPr>
-              <a:t>•  Witte plek: hybride papier + digitaal bewijs</a:t>
-            </a:r>
-          </a:p>
-          <a:p>
-            <a:pPr>
-              <a:spcAft>
-                <a:spcPts val="400"/>
-              </a:spcAft>
-            </a:pPr>
-            <a:r>
-              <a:rPr sz="1050">
-                <a:solidFill>
-                  <a:srgbClr val="6B6173"/>
-                </a:solidFill>
-                <a:latin typeface="Calibri"/>
-              </a:rPr>
-              <a:t>•  Aurora als eerste geloofwaardig in die combinatie</a:t>
-            </a:r>
-          </a:p>
-        </p:txBody>
-      </p:sp>
-    </p:spTree>
-  </p:cSld>
-  <p:clrMapOvr>
-    <a:masterClrMapping/>
-  </p:clrMapOvr>
-</p:sld>
-</file>
-
-<file path=ppt/slides/slide3.xml><?xml version="1.0" encoding="utf-8"?>
-<p:sld xmlns:a="http://schemas.openxmlformats.org/drawingml/2006/main" xmlns:p="http://schemas.openxmlformats.org/presentationml/2006/main" xmlns:r="http://schemas.openxmlformats.org/officeDocument/2006/relationships">
-  <p:cSld>
-    <p:spTree>
-      <p:nvGrpSpPr>
-        <p:cNvPr id="1" name=""/>
-        <p:cNvGrpSpPr/>
-        <p:nvPr/>
-      </p:nvGrpSpPr>
-      <p:grpSpPr/>
-      <p:sp>
-        <p:nvSpPr>
-          <p:cNvPr id="2" name="Rectangle 1"/>
-          <p:cNvSpPr/>
-          <p:nvPr/>
-        </p:nvSpPr>
-        <p:spPr>
-          <a:xfrm>
-            <a:off x="0" y="0"/>
-            <a:ext cx="12188952" cy="6858000"/>
-          </a:xfrm>
-          <a:prstGeom prst="rect">
-            <a:avLst/>
-          </a:prstGeom>
-          <a:solidFill>
-            <a:srgbClr val="F8F5EF"/>
-          </a:solidFill>
-          <a:ln>
-            <a:noFill/>
-          </a:ln>
-        </p:spPr>
-        <p:style>
-          <a:lnRef idx="1">
-            <a:schemeClr val="accent1"/>
-          </a:lnRef>
-          <a:fillRef idx="3">
-            <a:schemeClr val="accent1"/>
-          </a:fillRef>
-          <a:effectRef idx="2">
-            <a:schemeClr val="accent1"/>
-          </a:effectRef>
-          <a:fontRef idx="minor">
-            <a:schemeClr val="lt1"/>
-          </a:fontRef>
-        </p:style>
-        <p:txBody>
-          <a:bodyPr rtlCol="0" anchor="ctr"/>
-          <a:lstStyle/>
-          <a:p>
-            <a:pPr algn="ctr"/>
-          </a:p>
-        </p:txBody>
-      </p:sp>
-      <p:sp>
-        <p:nvSpPr>
-          <p:cNvPr id="3" name="Rectangle 2"/>
-          <p:cNvSpPr/>
-          <p:nvPr/>
-        </p:nvSpPr>
-        <p:spPr>
-          <a:xfrm>
-            <a:off x="548640" y="411480"/>
-            <a:ext cx="274320" cy="36576"/>
-          </a:xfrm>
-          <a:prstGeom prst="rect">
-            <a:avLst/>
-          </a:prstGeom>
-          <a:solidFill>
-            <a:srgbClr val="F59E0B"/>
-          </a:solidFill>
-          <a:ln>
-            <a:noFill/>
-          </a:ln>
-        </p:spPr>
-        <p:style>
-          <a:lnRef idx="1">
-            <a:schemeClr val="accent1"/>
-          </a:lnRef>
-          <a:fillRef idx="3">
-            <a:schemeClr val="accent1"/>
-          </a:fillRef>
-          <a:effectRef idx="2">
-            <a:schemeClr val="accent1"/>
-          </a:effectRef>
-          <a:fontRef idx="minor">
-            <a:schemeClr val="lt1"/>
-          </a:fontRef>
-        </p:style>
-        <p:txBody>
-          <a:bodyPr rtlCol="0" anchor="ctr"/>
-          <a:lstStyle/>
-          <a:p>
-            <a:pPr algn="ctr"/>
-          </a:p>
-        </p:txBody>
-      </p:sp>
-      <p:sp>
-        <p:nvSpPr>
-          <p:cNvPr id="4" name="TextBox 3"/>
-          <p:cNvSpPr txBox="1"/>
-          <p:nvPr/>
-        </p:nvSpPr>
-        <p:spPr>
-          <a:xfrm>
-            <a:off x="914400" y="347472"/>
-            <a:ext cx="5486400" cy="274320"/>
-          </a:xfrm>
-          <a:prstGeom prst="rect">
-            <a:avLst/>
-          </a:prstGeom>
-          <a:noFill/>
-        </p:spPr>
-        <p:txBody>
-          <a:bodyPr wrap="square" lIns="0" rIns="0" tIns="0" bIns="0">
-            <a:spAutoFit/>
-          </a:bodyPr>
-          <a:lstStyle/>
-          <a:p>
-            <a:pPr algn="l"/>
-            <a:r>
-              <a:rPr sz="900" b="1">
-                <a:solidFill>
-                  <a:srgbClr val="F59E0B"/>
-                </a:solidFill>
-                <a:latin typeface="Calibri"/>
-              </a:rPr>
-              <a:t>ANALYSE · DEEL 2</a:t>
-            </a:r>
-          </a:p>
-        </p:txBody>
-      </p:sp>
-      <p:sp>
-        <p:nvSpPr>
-          <p:cNvPr id="5" name="TextBox 4"/>
-          <p:cNvSpPr txBox="1"/>
-          <p:nvPr/>
-        </p:nvSpPr>
-        <p:spPr>
-          <a:xfrm>
-            <a:off x="548640" y="566928"/>
-            <a:ext cx="10058400" cy="548640"/>
-          </a:xfrm>
-          <a:prstGeom prst="rect">
-            <a:avLst/>
-          </a:prstGeom>
-          <a:noFill/>
-        </p:spPr>
-        <p:txBody>
-          <a:bodyPr wrap="square" lIns="0" rIns="0" tIns="0" bIns="0">
-            <a:spAutoFit/>
-          </a:bodyPr>
-          <a:lstStyle/>
-          <a:p>
-            <a:pPr algn="l"/>
-            <a:r>
-              <a:rPr sz="2600" b="1">
-                <a:solidFill>
-                  <a:srgbClr val="2D2938"/>
-                </a:solidFill>
-                <a:latin typeface="Calibri"/>
-              </a:rPr>
-              <a:t>Waarde &amp; financieel</a:t>
-            </a:r>
-          </a:p>
-        </p:txBody>
-      </p:sp>
-      <p:sp>
-        <p:nvSpPr>
-          <p:cNvPr id="6" name="Rounded Rectangle 5"/>
-          <p:cNvSpPr/>
-          <p:nvPr/>
-        </p:nvSpPr>
-        <p:spPr>
-          <a:xfrm>
-            <a:off x="548640" y="1417320"/>
-            <a:ext cx="3657600" cy="4846320"/>
-          </a:xfrm>
-          <a:prstGeom prst="roundRect">
-            <a:avLst>
-              <a:gd name="adj" fmla="val 8000"/>
-            </a:avLst>
-          </a:prstGeom>
-          <a:solidFill>
-            <a:srgbClr val="FFFFFF"/>
-          </a:solidFill>
-          <a:ln w="19050">
-            <a:solidFill>
-              <a:srgbClr val="F59E0B"/>
-            </a:solidFill>
-          </a:ln>
-        </p:spPr>
-        <p:style>
-          <a:lnRef idx="1">
-            <a:schemeClr val="accent1"/>
-          </a:lnRef>
-          <a:fillRef idx="3">
-            <a:schemeClr val="accent1"/>
-          </a:fillRef>
-          <a:effectRef idx="2">
-            <a:schemeClr val="accent1"/>
-          </a:effectRef>
-          <a:fontRef idx="minor">
-            <a:schemeClr val="lt1"/>
-          </a:fontRef>
-        </p:style>
-        <p:txBody>
-          <a:bodyPr rtlCol="0" anchor="ctr"/>
-          <a:lstStyle/>
-          <a:p>
-            <a:pPr algn="ctr"/>
-          </a:p>
-        </p:txBody>
-      </p:sp>
-      <p:sp>
-        <p:nvSpPr>
-          <p:cNvPr id="7" name="Rectangle 6"/>
-          <p:cNvSpPr/>
-          <p:nvPr/>
-        </p:nvSpPr>
-        <p:spPr>
-          <a:xfrm>
-            <a:off x="777240" y="1645920"/>
-            <a:ext cx="320040" cy="45720"/>
-          </a:xfrm>
-          <a:prstGeom prst="rect">
-            <a:avLst/>
-          </a:prstGeom>
-          <a:solidFill>
-            <a:srgbClr val="F59E0B"/>
-          </a:solidFill>
-          <a:ln>
-            <a:noFill/>
-          </a:ln>
-        </p:spPr>
-        <p:style>
-          <a:lnRef idx="1">
-            <a:schemeClr val="accent1"/>
-          </a:lnRef>
-          <a:fillRef idx="3">
-            <a:schemeClr val="accent1"/>
-          </a:fillRef>
-          <a:effectRef idx="2">
-            <a:schemeClr val="accent1"/>
-          </a:effectRef>
-          <a:fontRef idx="minor">
-            <a:schemeClr val="lt1"/>
-          </a:fontRef>
-        </p:style>
-        <p:txBody>
-          <a:bodyPr rtlCol="0" anchor="ctr"/>
-          <a:lstStyle/>
-          <a:p>
-            <a:pPr algn="ctr"/>
-          </a:p>
-        </p:txBody>
-      </p:sp>
-      <p:sp>
-        <p:nvSpPr>
-          <p:cNvPr id="8" name="TextBox 7"/>
-          <p:cNvSpPr txBox="1"/>
-          <p:nvPr/>
-        </p:nvSpPr>
-        <p:spPr>
-          <a:xfrm>
-            <a:off x="777240" y="1737360"/>
-            <a:ext cx="3200400" cy="320040"/>
-          </a:xfrm>
-          <a:prstGeom prst="rect">
-            <a:avLst/>
-          </a:prstGeom>
-          <a:noFill/>
-        </p:spPr>
-        <p:txBody>
-          <a:bodyPr wrap="square" lIns="0" rIns="0" tIns="0" bIns="0">
-            <a:spAutoFit/>
-          </a:bodyPr>
-          <a:lstStyle/>
-          <a:p>
-            <a:pPr algn="l"/>
-            <a:r>
-              <a:rPr sz="1300" b="1">
-                <a:solidFill>
-                  <a:srgbClr val="2D2938"/>
-                </a:solidFill>
-                <a:latin typeface="Calibri"/>
-              </a:rPr>
-              <a:t>Customer value</a:t>
-            </a:r>
-          </a:p>
-        </p:txBody>
-      </p:sp>
-      <p:sp>
-        <p:nvSpPr>
-          <p:cNvPr id="9" name="TextBox 8"/>
-          <p:cNvSpPr txBox="1"/>
-          <p:nvPr/>
-        </p:nvSpPr>
-        <p:spPr>
-          <a:xfrm>
-            <a:off x="777240" y="2148840"/>
-            <a:ext cx="3200400" cy="4023360"/>
-          </a:xfrm>
-          <a:prstGeom prst="rect">
-            <a:avLst/>
-          </a:prstGeom>
-          <a:noFill/>
-        </p:spPr>
-        <p:txBody>
-          <a:bodyPr wrap="square" lIns="0" rIns="0" tIns="0" bIns="0">
-            <a:spAutoFit/>
-          </a:bodyPr>
-          <a:lstStyle/>
-          <a:p>
-            <a:pPr>
-              <a:spcAft>
-                <a:spcPts val="400"/>
-              </a:spcAft>
-            </a:pPr>
-            <a:r>
-              <a:rPr sz="1050">
-                <a:solidFill>
-                  <a:srgbClr val="6B6173"/>
-                </a:solidFill>
-                <a:latin typeface="Calibri"/>
-              </a:rPr>
-              <a:t>•  Notaris: rechtsgeldigheid zonder extra stap</a:t>
-            </a:r>
-          </a:p>
-          <a:p>
-            <a:pPr>
-              <a:spcAft>
-                <a:spcPts val="400"/>
-              </a:spcAft>
-            </a:pPr>
-            <a:r>
-              <a:rPr sz="1050">
-                <a:solidFill>
-                  <a:srgbClr val="6B6173"/>
-                </a:solidFill>
-                <a:latin typeface="Calibri"/>
-              </a:rPr>
-              <a:t>•  Bank: fraudepreventie bij contracten</a:t>
-            </a:r>
-          </a:p>
-          <a:p>
-            <a:pPr>
-              <a:spcAft>
-                <a:spcPts val="400"/>
-              </a:spcAft>
-            </a:pPr>
-            <a:r>
-              <a:rPr sz="1050">
-                <a:solidFill>
-                  <a:srgbClr val="6B6173"/>
-                </a:solidFill>
-                <a:latin typeface="Calibri"/>
-              </a:rPr>
-              <a:t>•  Gemeente: schaalbare ondertekening</a:t>
-            </a:r>
-          </a:p>
-          <a:p>
-            <a:pPr>
-              <a:spcAft>
-                <a:spcPts val="400"/>
-              </a:spcAft>
-            </a:pPr>
-            <a:r>
-              <a:rPr sz="1050">
-                <a:solidFill>
-                  <a:srgbClr val="6B6173"/>
-                </a:solidFill>
-                <a:latin typeface="Calibri"/>
-              </a:rPr>
-              <a:t>•  Eindgebruiker: vertrouwde handtekening met bewijsbare identiteit</a:t>
-            </a:r>
-          </a:p>
-        </p:txBody>
-      </p:sp>
-      <p:sp>
-        <p:nvSpPr>
-          <p:cNvPr id="10" name="Rounded Rectangle 9"/>
-          <p:cNvSpPr/>
-          <p:nvPr/>
-        </p:nvSpPr>
-        <p:spPr>
-          <a:xfrm>
-            <a:off x="4343400" y="1417320"/>
-            <a:ext cx="3657600" cy="4846320"/>
-          </a:xfrm>
-          <a:prstGeom prst="roundRect">
-            <a:avLst>
-              <a:gd name="adj" fmla="val 8000"/>
-            </a:avLst>
-          </a:prstGeom>
-          <a:solidFill>
-            <a:srgbClr val="FFFFFF"/>
-          </a:solidFill>
-          <a:ln w="19050">
-            <a:solidFill>
-              <a:srgbClr val="F59E0B"/>
-            </a:solidFill>
-          </a:ln>
-        </p:spPr>
-        <p:style>
-          <a:lnRef idx="1">
-            <a:schemeClr val="accent1"/>
-          </a:lnRef>
-          <a:fillRef idx="3">
-            <a:schemeClr val="accent1"/>
-          </a:fillRef>
-          <a:effectRef idx="2">
-            <a:schemeClr val="accent1"/>
-          </a:effectRef>
-          <a:fontRef idx="minor">
-            <a:schemeClr val="lt1"/>
-          </a:fontRef>
-        </p:style>
-        <p:txBody>
-          <a:bodyPr rtlCol="0" anchor="ctr"/>
-          <a:lstStyle/>
-          <a:p>
-            <a:pPr algn="ctr"/>
-          </a:p>
-        </p:txBody>
-      </p:sp>
-      <p:sp>
-        <p:nvSpPr>
-          <p:cNvPr id="11" name="Rectangle 10"/>
-          <p:cNvSpPr/>
-          <p:nvPr/>
-        </p:nvSpPr>
-        <p:spPr>
-          <a:xfrm>
-            <a:off x="4572000" y="1645920"/>
-            <a:ext cx="320040" cy="45720"/>
-          </a:xfrm>
-          <a:prstGeom prst="rect">
-            <a:avLst/>
-          </a:prstGeom>
-          <a:solidFill>
-            <a:srgbClr val="F59E0B"/>
-          </a:solidFill>
-          <a:ln>
-            <a:noFill/>
-          </a:ln>
-        </p:spPr>
-        <p:style>
-          <a:lnRef idx="1">
-            <a:schemeClr val="accent1"/>
-          </a:lnRef>
-          <a:fillRef idx="3">
-            <a:schemeClr val="accent1"/>
-          </a:fillRef>
-          <a:effectRef idx="2">
-            <a:schemeClr val="accent1"/>
-          </a:effectRef>
-          <a:fontRef idx="minor">
-            <a:schemeClr val="lt1"/>
-          </a:fontRef>
-        </p:style>
-        <p:txBody>
-          <a:bodyPr rtlCol="0" anchor="ctr"/>
-          <a:lstStyle/>
-          <a:p>
-            <a:pPr algn="ctr"/>
-          </a:p>
-        </p:txBody>
-      </p:sp>
-      <p:sp>
-        <p:nvSpPr>
-          <p:cNvPr id="12" name="TextBox 11"/>
-          <p:cNvSpPr txBox="1"/>
-          <p:nvPr/>
-        </p:nvSpPr>
-        <p:spPr>
-          <a:xfrm>
-            <a:off x="4572000" y="1737360"/>
-            <a:ext cx="3200400" cy="320040"/>
-          </a:xfrm>
-          <a:prstGeom prst="rect">
-            <a:avLst/>
-          </a:prstGeom>
-          <a:noFill/>
-        </p:spPr>
-        <p:txBody>
-          <a:bodyPr wrap="square" lIns="0" rIns="0" tIns="0" bIns="0">
-            <a:spAutoFit/>
-          </a:bodyPr>
-          <a:lstStyle/>
-          <a:p>
-            <a:pPr algn="l"/>
-            <a:r>
-              <a:rPr sz="1300" b="1">
-                <a:solidFill>
-                  <a:srgbClr val="2D2938"/>
-                </a:solidFill>
-                <a:latin typeface="Calibri"/>
-              </a:rPr>
-              <a:t>Financiële kansen</a:t>
-            </a:r>
-          </a:p>
-        </p:txBody>
-      </p:sp>
-      <p:sp>
-        <p:nvSpPr>
-          <p:cNvPr id="13" name="TextBox 12"/>
-          <p:cNvSpPr txBox="1"/>
-          <p:nvPr/>
-        </p:nvSpPr>
-        <p:spPr>
-          <a:xfrm>
-            <a:off x="4572000" y="2148840"/>
-            <a:ext cx="3200400" cy="4023360"/>
-          </a:xfrm>
-          <a:prstGeom prst="rect">
-            <a:avLst/>
-          </a:prstGeom>
-          <a:noFill/>
-        </p:spPr>
-        <p:txBody>
-          <a:bodyPr wrap="square" lIns="0" rIns="0" tIns="0" bIns="0">
-            <a:spAutoFit/>
-          </a:bodyPr>
-          <a:lstStyle/>
-          <a:p>
-            <a:pPr>
-              <a:spcAft>
-                <a:spcPts val="400"/>
-              </a:spcAft>
-            </a:pPr>
-            <a:r>
-              <a:rPr sz="1050">
-                <a:solidFill>
-                  <a:srgbClr val="6B6173"/>
-                </a:solidFill>
-                <a:latin typeface="Calibri"/>
-              </a:rPr>
-              <a:t>•  Licentiemodel kennismodel (recurring)</a:t>
-            </a:r>
-          </a:p>
-          <a:p>
-            <a:pPr>
-              <a:spcAft>
-                <a:spcPts val="400"/>
-              </a:spcAft>
-            </a:pPr>
-            <a:r>
-              <a:rPr sz="1050">
-                <a:solidFill>
-                  <a:srgbClr val="6B6173"/>
-                </a:solidFill>
-                <a:latin typeface="Calibri"/>
-              </a:rPr>
-              <a:t>•  Hardware-omzet verificatiestations</a:t>
-            </a:r>
-          </a:p>
-          <a:p>
-            <a:pPr>
-              <a:spcAft>
-                <a:spcPts val="400"/>
-              </a:spcAft>
-            </a:pPr>
-            <a:r>
-              <a:rPr sz="1050">
-                <a:solidFill>
-                  <a:srgbClr val="6B6173"/>
-                </a:solidFill>
-                <a:latin typeface="Calibri"/>
-              </a:rPr>
-              <a:t>•  Training en consultancy bij uitrol</a:t>
-            </a:r>
-          </a:p>
-          <a:p>
-            <a:pPr>
-              <a:spcAft>
-                <a:spcPts val="400"/>
-              </a:spcAft>
-            </a:pPr>
-            <a:r>
-              <a:rPr sz="1050">
-                <a:solidFill>
-                  <a:srgbClr val="6B6173"/>
-                </a:solidFill>
-                <a:latin typeface="Calibri"/>
-              </a:rPr>
-              <a:t>•  NL-markt: ~3.000 notarissen, banken, 340 gemeenten, zakelijk</a:t>
-            </a:r>
-          </a:p>
-          <a:p>
-            <a:pPr>
-              <a:spcAft>
-                <a:spcPts val="400"/>
-              </a:spcAft>
-            </a:pPr>
-            <a:r>
-              <a:rPr sz="1050">
-                <a:solidFill>
-                  <a:srgbClr val="6B6173"/>
-                </a:solidFill>
-                <a:latin typeface="Calibri"/>
-              </a:rPr>
-              <a:t>•  Merkextensie zonder kannibalisatie bestaande lijn</a:t>
-            </a:r>
-          </a:p>
-        </p:txBody>
-      </p:sp>
-      <p:sp>
-        <p:nvSpPr>
-          <p:cNvPr id="14" name="Rounded Rectangle 13"/>
-          <p:cNvSpPr/>
-          <p:nvPr/>
-        </p:nvSpPr>
-        <p:spPr>
-          <a:xfrm>
-            <a:off x="8138160" y="1417320"/>
-            <a:ext cx="3657600" cy="4846320"/>
-          </a:xfrm>
-          <a:prstGeom prst="roundRect">
-            <a:avLst>
-              <a:gd name="adj" fmla="val 8000"/>
-            </a:avLst>
-          </a:prstGeom>
-          <a:solidFill>
-            <a:srgbClr val="FDECEA"/>
-          </a:solidFill>
-          <a:ln w="19050">
-            <a:solidFill>
-              <a:srgbClr val="F47264"/>
-            </a:solidFill>
-          </a:ln>
-        </p:spPr>
-        <p:style>
-          <a:lnRef idx="1">
-            <a:schemeClr val="accent1"/>
-          </a:lnRef>
-          <a:fillRef idx="3">
-            <a:schemeClr val="accent1"/>
-          </a:fillRef>
-          <a:effectRef idx="2">
-            <a:schemeClr val="accent1"/>
-          </a:effectRef>
-          <a:fontRef idx="minor">
-            <a:schemeClr val="lt1"/>
-          </a:fontRef>
-        </p:style>
-        <p:txBody>
-          <a:bodyPr rtlCol="0" anchor="ctr"/>
-          <a:lstStyle/>
-          <a:p>
-            <a:pPr algn="ctr"/>
-          </a:p>
-        </p:txBody>
-      </p:sp>
-      <p:sp>
-        <p:nvSpPr>
-          <p:cNvPr id="15" name="Rectangle 14"/>
-          <p:cNvSpPr/>
-          <p:nvPr/>
-        </p:nvSpPr>
-        <p:spPr>
-          <a:xfrm>
-            <a:off x="8366760" y="1645920"/>
-            <a:ext cx="320040" cy="45720"/>
-          </a:xfrm>
-          <a:prstGeom prst="rect">
-            <a:avLst/>
-          </a:prstGeom>
-          <a:solidFill>
-            <a:srgbClr val="F47264"/>
-          </a:solidFill>
-          <a:ln>
-            <a:noFill/>
-          </a:ln>
-        </p:spPr>
-        <p:style>
-          <a:lnRef idx="1">
-            <a:schemeClr val="accent1"/>
-          </a:lnRef>
-          <a:fillRef idx="3">
-            <a:schemeClr val="accent1"/>
-          </a:fillRef>
-          <a:effectRef idx="2">
-            <a:schemeClr val="accent1"/>
-          </a:effectRef>
-          <a:fontRef idx="minor">
-            <a:schemeClr val="lt1"/>
-          </a:fontRef>
-        </p:style>
-        <p:txBody>
-          <a:bodyPr rtlCol="0" anchor="ctr"/>
-          <a:lstStyle/>
-          <a:p>
-            <a:pPr algn="ctr"/>
-          </a:p>
-        </p:txBody>
-      </p:sp>
-      <p:sp>
-        <p:nvSpPr>
-          <p:cNvPr id="16" name="TextBox 15"/>
-          <p:cNvSpPr txBox="1"/>
-          <p:nvPr/>
-        </p:nvSpPr>
-        <p:spPr>
-          <a:xfrm>
-            <a:off x="8366760" y="1737360"/>
-            <a:ext cx="3200400" cy="320040"/>
-          </a:xfrm>
-          <a:prstGeom prst="rect">
-            <a:avLst/>
-          </a:prstGeom>
-          <a:noFill/>
-        </p:spPr>
-        <p:txBody>
-          <a:bodyPr wrap="square" lIns="0" rIns="0" tIns="0" bIns="0">
-            <a:spAutoFit/>
-          </a:bodyPr>
-          <a:lstStyle/>
-          <a:p>
-            <a:pPr algn="l"/>
-            <a:r>
-              <a:rPr sz="1300" b="1">
-                <a:solidFill>
-                  <a:srgbClr val="2D2938"/>
-                </a:solidFill>
-                <a:latin typeface="Calibri"/>
-              </a:rPr>
-              <a:t>Financiële risico's</a:t>
-            </a:r>
-          </a:p>
-        </p:txBody>
-      </p:sp>
-      <p:sp>
-        <p:nvSpPr>
-          <p:cNvPr id="17" name="TextBox 16"/>
-          <p:cNvSpPr txBox="1"/>
-          <p:nvPr/>
-        </p:nvSpPr>
-        <p:spPr>
-          <a:xfrm>
-            <a:off x="8366760" y="2148840"/>
-            <a:ext cx="3200400" cy="4023360"/>
-          </a:xfrm>
-          <a:prstGeom prst="rect">
-            <a:avLst/>
-          </a:prstGeom>
-          <a:noFill/>
-        </p:spPr>
-        <p:txBody>
-          <a:bodyPr wrap="square" lIns="0" rIns="0" tIns="0" bIns="0">
-            <a:spAutoFit/>
-          </a:bodyPr>
-          <a:lstStyle/>
-          <a:p>
-            <a:pPr>
-              <a:spcAft>
-                <a:spcPts val="400"/>
-              </a:spcAft>
-            </a:pPr>
-            <a:r>
-              <a:rPr sz="1050">
-                <a:solidFill>
-                  <a:srgbClr val="6B6173"/>
-                </a:solidFill>
-                <a:latin typeface="Calibri"/>
-              </a:rPr>
-              <a:t>•  Ontwikkelkosten techpartner buiten onze grip</a:t>
-            </a:r>
-          </a:p>
-          <a:p>
-            <a:pPr>
-              <a:spcAft>
-                <a:spcPts val="400"/>
-              </a:spcAft>
-            </a:pPr>
-            <a:r>
-              <a:rPr sz="1050">
-                <a:solidFill>
-                  <a:srgbClr val="6B6173"/>
-                </a:solidFill>
-                <a:latin typeface="Calibri"/>
-              </a:rPr>
-              <a:t>•  Adoptietijd lang (compliance, juridisch)</a:t>
-            </a:r>
-          </a:p>
-          <a:p>
-            <a:pPr>
-              <a:spcAft>
-                <a:spcPts val="400"/>
-              </a:spcAft>
-            </a:pPr>
-            <a:r>
-              <a:rPr sz="1050">
-                <a:solidFill>
-                  <a:srgbClr val="6B6173"/>
-                </a:solidFill>
-                <a:latin typeface="Calibri"/>
-              </a:rPr>
-              <a:t>•  Afhankelijkheid van één techpartner</a:t>
-            </a:r>
-          </a:p>
-          <a:p>
-            <a:pPr>
-              <a:spcAft>
-                <a:spcPts val="400"/>
-              </a:spcAft>
-            </a:pPr>
-            <a:r>
-              <a:rPr sz="1050">
-                <a:solidFill>
-                  <a:srgbClr val="6B6173"/>
-                </a:solidFill>
-                <a:latin typeface="Calibri"/>
-              </a:rPr>
-              <a:t>•  Fully-digital concurrentie drukt marges</a:t>
-            </a:r>
-          </a:p>
-          <a:p>
-            <a:pPr>
-              <a:spcAft>
-                <a:spcPts val="400"/>
-              </a:spcAft>
-            </a:pPr>
-            <a:r>
-              <a:rPr sz="1050">
-                <a:solidFill>
-                  <a:srgbClr val="6B6173"/>
-                </a:solidFill>
-                <a:latin typeface="Calibri"/>
-              </a:rPr>
-              <a:t>•  Risico cannibalisatie pen-lijn bij brede uitrol</a:t>
-            </a:r>
-          </a:p>
-        </p:txBody>
-      </p:sp>
+        </p:spPr>
+      </p:pic>
     </p:spTree>
   </p:cSld>
   <p:clrMapOvr>
